--- a/军民融合/ppt/3B.pptx
+++ b/军民融合/ppt/3B.pptx
@@ -877,8 +877,8 @@
         </p:nvSpPr>
         <p:spPr>
           <a:xfrm>
-            <a:off x="137160" y="109728"/>
-            <a:ext cx="11932920" cy="6638544"/>
+            <a:off x="137160" y="273050"/>
+            <a:ext cx="11932920" cy="6475095"/>
           </a:xfrm>
           <a:prstGeom prst="roundRect">
             <a:avLst>
@@ -901,8 +901,8 @@
         </p:nvSpPr>
         <p:spPr>
           <a:xfrm>
-            <a:off x="2075688" y="256032"/>
-            <a:ext cx="8046720" cy="621792"/>
+            <a:off x="3039745" y="0"/>
+            <a:ext cx="6125210" cy="488315"/>
           </a:xfrm>
           <a:prstGeom prst="roundRect">
             <a:avLst>
@@ -922,8 +922,8 @@
         </p:nvSpPr>
         <p:spPr>
           <a:xfrm>
-            <a:off x="2075688" y="256032"/>
-            <a:ext cx="8046720" cy="621792"/>
+            <a:off x="2075815" y="0"/>
+            <a:ext cx="8046720" cy="488315"/>
           </a:xfrm>
           <a:prstGeom prst="rect">
             <a:avLst/>
@@ -940,17 +940,22 @@
               <a:buNone/>
             </a:pPr>
             <a:r>
-              <a:rPr lang="en-US" sz="2500" b="1" dirty="0">
+              <a:rPr lang="zh-CN" altLang="en-US" sz="2000" b="1" dirty="0">
                 <a:solidFill>
-                  <a:srgbClr val="FFFFFF"/>
+                  <a:schemeClr val="bg1"/>
                 </a:solidFill>
                 <a:latin typeface="微软雅黑" panose="020B0503020204020204" pitchFamily="34" charset="-122"/>
                 <a:ea typeface="微软雅黑" panose="020B0503020204020204" pitchFamily="34" charset="-122"/>
-                <a:cs typeface="微软雅黑" panose="020B0503020204020204" pitchFamily="34" charset="-120"/>
               </a:rPr>
-              <a:t>知识驱动的轻量化频谱信号识别与目标轨迹分析方法</a:t>
+              <a:t>频谱知识驱动的轻量化目标识别与轨迹分析方法</a:t>
             </a:r>
-            <a:endParaRPr lang="en-US" sz="2500" dirty="0"/>
+            <a:endParaRPr lang="zh-CN" altLang="en-US" sz="2000" b="1" dirty="0">
+              <a:solidFill>
+                <a:schemeClr val="bg1"/>
+              </a:solidFill>
+              <a:latin typeface="微软雅黑" panose="020B0503020204020204" pitchFamily="34" charset="-122"/>
+              <a:ea typeface="微软雅黑" panose="020B0503020204020204" pitchFamily="34" charset="-122"/>
+            </a:endParaRPr>
           </a:p>
         </p:txBody>
       </p:sp>
@@ -962,8 +967,8 @@
         </p:nvSpPr>
         <p:spPr>
           <a:xfrm>
-            <a:off x="411480" y="1225296"/>
-            <a:ext cx="1481328" cy="4297680"/>
+            <a:off x="411480" y="296545"/>
+            <a:ext cx="1481455" cy="6393815"/>
           </a:xfrm>
           <a:prstGeom prst="roundRect">
             <a:avLst>
@@ -989,8 +994,8 @@
         </p:nvSpPr>
         <p:spPr>
           <a:xfrm>
-            <a:off x="512064" y="1353312"/>
-            <a:ext cx="1280160" cy="1865376"/>
+            <a:off x="511810" y="480695"/>
+            <a:ext cx="1280160" cy="2798445"/>
           </a:xfrm>
           <a:prstGeom prst="roundRect">
             <a:avLst>
@@ -1008,30 +1013,6 @@
           </a:ln>
         </p:spPr>
       </p:sp>
-      <p:pic>
-        <p:nvPicPr>
-          <p:cNvPr id="7" name="Image 0" descr="preencoded.png"/>
-          <p:cNvPicPr>
-            <a:picLocks noChangeAspect="1"/>
-          </p:cNvPicPr>
-          <p:nvPr/>
-        </p:nvPicPr>
-        <p:blipFill>
-          <a:blip r:embed="rId1"/>
-          <a:stretch>
-            <a:fillRect/>
-          </a:stretch>
-        </p:blipFill>
-        <p:spPr>
-          <a:xfrm>
-            <a:off x="841248" y="1517904"/>
-            <a:ext cx="621792" cy="621792"/>
-          </a:xfrm>
-          <a:prstGeom prst="rect">
-            <a:avLst/>
-          </a:prstGeom>
-        </p:spPr>
-      </p:pic>
       <p:sp>
         <p:nvSpPr>
           <p:cNvPr id="8" name="Text 5"/>
@@ -1040,8 +1021,8 @@
         </p:nvSpPr>
         <p:spPr>
           <a:xfrm>
-            <a:off x="512064" y="2340864"/>
-            <a:ext cx="1280160" cy="914400"/>
+            <a:off x="729615" y="2684780"/>
+            <a:ext cx="870585" cy="914400"/>
           </a:xfrm>
           <a:prstGeom prst="rect">
             <a:avLst/>
@@ -1059,7 +1040,7 @@
               <a:buNone/>
             </a:pPr>
             <a:r>
-              <a:rPr lang="en-US" sz="1400" b="1" dirty="0">
+              <a:rPr lang="zh-CN" altLang="en-US" sz="1600" b="1" dirty="0">
                 <a:solidFill>
                   <a:srgbClr val="2E54A1"/>
                 </a:solidFill>
@@ -1067,38 +1048,16 @@
                 <a:ea typeface="微软雅黑" panose="020B0503020204020204" pitchFamily="34" charset="-122"/>
                 <a:cs typeface="微软雅黑" panose="020B0503020204020204" pitchFamily="34" charset="-120"/>
               </a:rPr>
-              <a:t>频谱知识</a:t>
+              <a:t>知识图谱先验嵌入</a:t>
             </a:r>
-            <a:endParaRPr lang="en-US" sz="1400" dirty="0"/>
-          </a:p>
-          <a:p>
-            <a:pPr marL="0" indent="0" algn="ctr">
-              <a:lnSpc>
-                <a:spcPct val="98000"/>
-              </a:lnSpc>
-              <a:buNone/>
-            </a:pPr>
-            <a:r>
-              <a:rPr lang="en-US" sz="1400" b="1" dirty="0">
-                <a:solidFill>
-                  <a:srgbClr val="2E54A1"/>
-                </a:solidFill>
-                <a:latin typeface="微软雅黑" panose="020B0503020204020204" pitchFamily="34" charset="-122"/>
-                <a:ea typeface="微软雅黑" panose="020B0503020204020204" pitchFamily="34" charset="-122"/>
-                <a:cs typeface="微软雅黑" panose="020B0503020204020204" pitchFamily="34" charset="-120"/>
-              </a:rPr>
-              <a:t>图谱先验</a:t>
-            </a:r>
-            <a:endParaRPr lang="en-US" sz="1400" dirty="0"/>
-          </a:p>
-          <a:p>
-            <a:pPr marL="0" indent="0" algn="ctr">
-              <a:lnSpc>
-                <a:spcPct val="98000"/>
-              </a:lnSpc>
-              <a:buNone/>
-            </a:pPr>
-            <a:endParaRPr lang="en-US" sz="1400" dirty="0"/>
+            <a:endParaRPr lang="zh-CN" altLang="en-US" sz="1600" b="1" dirty="0">
+              <a:solidFill>
+                <a:srgbClr val="2E54A1"/>
+              </a:solidFill>
+              <a:latin typeface="微软雅黑" panose="020B0503020204020204" pitchFamily="34" charset="-122"/>
+              <a:ea typeface="微软雅黑" panose="020B0503020204020204" pitchFamily="34" charset="-122"/>
+              <a:cs typeface="微软雅黑" panose="020B0503020204020204" pitchFamily="34" charset="-120"/>
+            </a:endParaRPr>
           </a:p>
         </p:txBody>
       </p:sp>
@@ -1110,8 +1069,8 @@
         </p:nvSpPr>
         <p:spPr>
           <a:xfrm>
-            <a:off x="512064" y="3346704"/>
-            <a:ext cx="1280160" cy="2048256"/>
+            <a:off x="511810" y="3614420"/>
+            <a:ext cx="1280160" cy="3048000"/>
           </a:xfrm>
           <a:prstGeom prst="roundRect">
             <a:avLst>
@@ -1131,440 +1090,14 @@
       </p:sp>
       <p:sp>
         <p:nvSpPr>
-          <p:cNvPr id="10" name="Shape 7"/>
-          <p:cNvSpPr/>
-          <p:nvPr/>
-        </p:nvSpPr>
-        <p:spPr>
-          <a:xfrm>
-            <a:off x="722757" y="3659429"/>
-            <a:ext cx="62230" cy="181051"/>
-          </a:xfrm>
-          <a:prstGeom prst="rect">
-            <a:avLst/>
-          </a:prstGeom>
-          <a:solidFill>
-            <a:srgbClr val="4874CB"/>
-          </a:solidFill>
-        </p:spPr>
-      </p:sp>
-      <p:sp>
-        <p:nvSpPr>
-          <p:cNvPr id="11" name="Shape 8"/>
-          <p:cNvSpPr/>
-          <p:nvPr/>
-        </p:nvSpPr>
-        <p:spPr>
-          <a:xfrm>
-            <a:off x="822325" y="3518611"/>
-            <a:ext cx="62230" cy="321869"/>
-          </a:xfrm>
-          <a:prstGeom prst="rect">
-            <a:avLst/>
-          </a:prstGeom>
-          <a:solidFill>
-            <a:srgbClr val="4874CB"/>
-          </a:solidFill>
-        </p:spPr>
-      </p:sp>
-      <p:sp>
-        <p:nvSpPr>
-          <p:cNvPr id="12" name="Shape 9"/>
-          <p:cNvSpPr/>
-          <p:nvPr/>
-        </p:nvSpPr>
-        <p:spPr>
-          <a:xfrm>
-            <a:off x="921893" y="3619195"/>
-            <a:ext cx="62230" cy="221285"/>
-          </a:xfrm>
-          <a:prstGeom prst="rect">
-            <a:avLst/>
-          </a:prstGeom>
-          <a:solidFill>
-            <a:srgbClr val="4874CB"/>
-          </a:solidFill>
-        </p:spPr>
-      </p:sp>
-      <p:sp>
-        <p:nvSpPr>
-          <p:cNvPr id="13" name="Shape 10"/>
-          <p:cNvSpPr/>
-          <p:nvPr/>
-        </p:nvSpPr>
-        <p:spPr>
-          <a:xfrm>
-            <a:off x="1021461" y="3438144"/>
-            <a:ext cx="62230" cy="402336"/>
-          </a:xfrm>
-          <a:prstGeom prst="rect">
-            <a:avLst/>
-          </a:prstGeom>
-          <a:solidFill>
-            <a:srgbClr val="4874CB"/>
-          </a:solidFill>
-        </p:spPr>
-      </p:sp>
-      <p:sp>
-        <p:nvSpPr>
-          <p:cNvPr id="14" name="Shape 11"/>
-          <p:cNvSpPr/>
-          <p:nvPr/>
-        </p:nvSpPr>
-        <p:spPr>
-          <a:xfrm>
-            <a:off x="1121029" y="3558845"/>
-            <a:ext cx="62230" cy="281635"/>
-          </a:xfrm>
-          <a:prstGeom prst="rect">
-            <a:avLst/>
-          </a:prstGeom>
-          <a:solidFill>
-            <a:srgbClr val="4874CB"/>
-          </a:solidFill>
-        </p:spPr>
-      </p:sp>
-      <p:sp>
-        <p:nvSpPr>
-          <p:cNvPr id="15" name="Shape 12"/>
-          <p:cNvSpPr/>
-          <p:nvPr/>
-        </p:nvSpPr>
-        <p:spPr>
-          <a:xfrm>
-            <a:off x="1220597" y="3478378"/>
-            <a:ext cx="62230" cy="362102"/>
-          </a:xfrm>
-          <a:prstGeom prst="rect">
-            <a:avLst/>
-          </a:prstGeom>
-          <a:solidFill>
-            <a:srgbClr val="4874CB"/>
-          </a:solidFill>
-        </p:spPr>
-      </p:sp>
-      <p:sp>
-        <p:nvSpPr>
-          <p:cNvPr id="16" name="Shape 13"/>
-          <p:cNvSpPr/>
-          <p:nvPr/>
-        </p:nvSpPr>
-        <p:spPr>
-          <a:xfrm>
-            <a:off x="1320165" y="3639312"/>
-            <a:ext cx="62230" cy="201168"/>
-          </a:xfrm>
-          <a:prstGeom prst="rect">
-            <a:avLst/>
-          </a:prstGeom>
-          <a:solidFill>
-            <a:srgbClr val="4874CB"/>
-          </a:solidFill>
-        </p:spPr>
-      </p:sp>
-      <p:sp>
-        <p:nvSpPr>
-          <p:cNvPr id="17" name="Shape 14"/>
-          <p:cNvSpPr/>
-          <p:nvPr/>
-        </p:nvSpPr>
-        <p:spPr>
-          <a:xfrm>
-            <a:off x="1419733" y="3526658"/>
-            <a:ext cx="62230" cy="313822"/>
-          </a:xfrm>
-          <a:prstGeom prst="rect">
-            <a:avLst/>
-          </a:prstGeom>
-          <a:solidFill>
-            <a:srgbClr val="4874CB"/>
-          </a:solidFill>
-        </p:spPr>
-      </p:sp>
-      <p:sp>
-        <p:nvSpPr>
-          <p:cNvPr id="18" name="Shape 15"/>
-          <p:cNvSpPr/>
-          <p:nvPr/>
-        </p:nvSpPr>
-        <p:spPr>
-          <a:xfrm>
-            <a:off x="1519301" y="3679546"/>
-            <a:ext cx="62230" cy="160934"/>
-          </a:xfrm>
-          <a:prstGeom prst="rect">
-            <a:avLst/>
-          </a:prstGeom>
-          <a:solidFill>
-            <a:srgbClr val="4874CB"/>
-          </a:solidFill>
-        </p:spPr>
-      </p:sp>
-      <p:sp>
-        <p:nvSpPr>
-          <p:cNvPr id="19" name="Shape 16"/>
-          <p:cNvSpPr/>
-          <p:nvPr/>
-        </p:nvSpPr>
-        <p:spPr>
-          <a:xfrm>
-            <a:off x="704088" y="3840480"/>
-            <a:ext cx="896112" cy="0"/>
-          </a:xfrm>
-          <a:prstGeom prst="line">
-            <a:avLst/>
-          </a:prstGeom>
-          <a:noFill/>
-          <a:ln w="9525">
-            <a:solidFill>
-              <a:srgbClr val="5B6470"/>
-            </a:solidFill>
-            <a:prstDash val="solid"/>
-          </a:ln>
-        </p:spPr>
-      </p:sp>
-      <p:sp>
-        <p:nvSpPr>
-          <p:cNvPr id="20" name="Text 17"/>
-          <p:cNvSpPr/>
-          <p:nvPr/>
-        </p:nvSpPr>
-        <p:spPr>
-          <a:xfrm>
-            <a:off x="512064" y="3950208"/>
-            <a:ext cx="1280160" cy="237744"/>
-          </a:xfrm>
-          <a:prstGeom prst="rect">
-            <a:avLst/>
-          </a:prstGeom>
-          <a:noFill/>
-        </p:spPr>
-        <p:txBody>
-          <a:bodyPr wrap="square" lIns="0" tIns="0" rIns="0" bIns="0" rtlCol="0" anchor="ctr"/>
-          <a:lstStyle/>
-          <a:p>
-            <a:pPr marL="0" indent="0" algn="ctr">
-              <a:buNone/>
-            </a:pPr>
-            <a:r>
-              <a:rPr lang="en-US" sz="1300" b="1" dirty="0">
-                <a:solidFill>
-                  <a:srgbClr val="2E54A1"/>
-                </a:solidFill>
-                <a:latin typeface="微软雅黑" panose="020B0503020204020204" pitchFamily="34" charset="-122"/>
-                <a:ea typeface="微软雅黑" panose="020B0503020204020204" pitchFamily="34" charset="-122"/>
-                <a:cs typeface="微软雅黑" panose="020B0503020204020204" pitchFamily="34" charset="-120"/>
-              </a:rPr>
-              <a:t>⋮</a:t>
-            </a:r>
-            <a:endParaRPr lang="en-US" sz="1300" dirty="0"/>
-          </a:p>
-        </p:txBody>
-      </p:sp>
-      <p:sp>
-        <p:nvSpPr>
-          <p:cNvPr id="21" name="Shape 18"/>
-          <p:cNvSpPr/>
-          <p:nvPr/>
-        </p:nvSpPr>
-        <p:spPr>
-          <a:xfrm>
-            <a:off x="722757" y="4445813"/>
-            <a:ext cx="62230" cy="181051"/>
-          </a:xfrm>
-          <a:prstGeom prst="rect">
-            <a:avLst/>
-          </a:prstGeom>
-          <a:solidFill>
-            <a:srgbClr val="159A8C"/>
-          </a:solidFill>
-        </p:spPr>
-      </p:sp>
-      <p:sp>
-        <p:nvSpPr>
-          <p:cNvPr id="22" name="Shape 19"/>
-          <p:cNvSpPr/>
-          <p:nvPr/>
-        </p:nvSpPr>
-        <p:spPr>
-          <a:xfrm>
-            <a:off x="822325" y="4304995"/>
-            <a:ext cx="62230" cy="321869"/>
-          </a:xfrm>
-          <a:prstGeom prst="rect">
-            <a:avLst/>
-          </a:prstGeom>
-          <a:solidFill>
-            <a:srgbClr val="159A8C"/>
-          </a:solidFill>
-        </p:spPr>
-      </p:sp>
-      <p:sp>
-        <p:nvSpPr>
-          <p:cNvPr id="23" name="Shape 20"/>
-          <p:cNvSpPr/>
-          <p:nvPr/>
-        </p:nvSpPr>
-        <p:spPr>
-          <a:xfrm>
-            <a:off x="921893" y="4405579"/>
-            <a:ext cx="62230" cy="221285"/>
-          </a:xfrm>
-          <a:prstGeom prst="rect">
-            <a:avLst/>
-          </a:prstGeom>
-          <a:solidFill>
-            <a:srgbClr val="159A8C"/>
-          </a:solidFill>
-        </p:spPr>
-      </p:sp>
-      <p:sp>
-        <p:nvSpPr>
-          <p:cNvPr id="24" name="Shape 21"/>
-          <p:cNvSpPr/>
-          <p:nvPr/>
-        </p:nvSpPr>
-        <p:spPr>
-          <a:xfrm>
-            <a:off x="1021461" y="4224528"/>
-            <a:ext cx="62230" cy="402336"/>
-          </a:xfrm>
-          <a:prstGeom prst="rect">
-            <a:avLst/>
-          </a:prstGeom>
-          <a:solidFill>
-            <a:srgbClr val="159A8C"/>
-          </a:solidFill>
-        </p:spPr>
-      </p:sp>
-      <p:sp>
-        <p:nvSpPr>
-          <p:cNvPr id="25" name="Shape 22"/>
-          <p:cNvSpPr/>
-          <p:nvPr/>
-        </p:nvSpPr>
-        <p:spPr>
-          <a:xfrm>
-            <a:off x="1121029" y="4345229"/>
-            <a:ext cx="62230" cy="281635"/>
-          </a:xfrm>
-          <a:prstGeom prst="rect">
-            <a:avLst/>
-          </a:prstGeom>
-          <a:solidFill>
-            <a:srgbClr val="159A8C"/>
-          </a:solidFill>
-        </p:spPr>
-      </p:sp>
-      <p:sp>
-        <p:nvSpPr>
-          <p:cNvPr id="26" name="Shape 23"/>
-          <p:cNvSpPr/>
-          <p:nvPr/>
-        </p:nvSpPr>
-        <p:spPr>
-          <a:xfrm>
-            <a:off x="1220597" y="4264762"/>
-            <a:ext cx="62230" cy="362102"/>
-          </a:xfrm>
-          <a:prstGeom prst="rect">
-            <a:avLst/>
-          </a:prstGeom>
-          <a:solidFill>
-            <a:srgbClr val="159A8C"/>
-          </a:solidFill>
-        </p:spPr>
-      </p:sp>
-      <p:sp>
-        <p:nvSpPr>
-          <p:cNvPr id="27" name="Shape 24"/>
-          <p:cNvSpPr/>
-          <p:nvPr/>
-        </p:nvSpPr>
-        <p:spPr>
-          <a:xfrm>
-            <a:off x="1320165" y="4425696"/>
-            <a:ext cx="62230" cy="201168"/>
-          </a:xfrm>
-          <a:prstGeom prst="rect">
-            <a:avLst/>
-          </a:prstGeom>
-          <a:solidFill>
-            <a:srgbClr val="159A8C"/>
-          </a:solidFill>
-        </p:spPr>
-      </p:sp>
-      <p:sp>
-        <p:nvSpPr>
-          <p:cNvPr id="28" name="Shape 25"/>
-          <p:cNvSpPr/>
-          <p:nvPr/>
-        </p:nvSpPr>
-        <p:spPr>
-          <a:xfrm>
-            <a:off x="1419733" y="4313042"/>
-            <a:ext cx="62230" cy="313822"/>
-          </a:xfrm>
-          <a:prstGeom prst="rect">
-            <a:avLst/>
-          </a:prstGeom>
-          <a:solidFill>
-            <a:srgbClr val="159A8C"/>
-          </a:solidFill>
-        </p:spPr>
-      </p:sp>
-      <p:sp>
-        <p:nvSpPr>
-          <p:cNvPr id="29" name="Shape 26"/>
-          <p:cNvSpPr/>
-          <p:nvPr/>
-        </p:nvSpPr>
-        <p:spPr>
-          <a:xfrm>
-            <a:off x="1519301" y="4465930"/>
-            <a:ext cx="62230" cy="160934"/>
-          </a:xfrm>
-          <a:prstGeom prst="rect">
-            <a:avLst/>
-          </a:prstGeom>
-          <a:solidFill>
-            <a:srgbClr val="159A8C"/>
-          </a:solidFill>
-        </p:spPr>
-      </p:sp>
-      <p:sp>
-        <p:nvSpPr>
-          <p:cNvPr id="30" name="Shape 27"/>
-          <p:cNvSpPr/>
-          <p:nvPr/>
-        </p:nvSpPr>
-        <p:spPr>
-          <a:xfrm>
-            <a:off x="704088" y="4626864"/>
-            <a:ext cx="896112" cy="0"/>
-          </a:xfrm>
-          <a:prstGeom prst="line">
-            <a:avLst/>
-          </a:prstGeom>
-          <a:noFill/>
-          <a:ln w="9525">
-            <a:solidFill>
-              <a:srgbClr val="5B6470"/>
-            </a:solidFill>
-            <a:prstDash val="solid"/>
-          </a:ln>
-        </p:spPr>
-      </p:sp>
-      <p:sp>
-        <p:nvSpPr>
           <p:cNvPr id="31" name="Text 28"/>
           <p:cNvSpPr/>
           <p:nvPr/>
         </p:nvSpPr>
         <p:spPr>
           <a:xfrm>
-            <a:off x="512064" y="4791456"/>
-            <a:ext cx="1280160" cy="548640"/>
+            <a:off x="763905" y="5870575"/>
+            <a:ext cx="836295" cy="548640"/>
           </a:xfrm>
           <a:prstGeom prst="rect">
             <a:avLst/>
@@ -1582,7 +1115,7 @@
               <a:buNone/>
             </a:pPr>
             <a:r>
-              <a:rPr lang="en-US" sz="1400" b="1" dirty="0">
+              <a:rPr lang="en-US" sz="1600" b="1" dirty="0">
                 <a:solidFill>
                   <a:srgbClr val="2E54A1"/>
                 </a:solidFill>
@@ -1592,7 +1125,14 @@
               </a:rPr>
               <a:t>提取后频谱信号（时频谱）</a:t>
             </a:r>
-            <a:endParaRPr lang="en-US" sz="1400" dirty="0"/>
+            <a:endParaRPr lang="en-US" sz="1600" b="1" dirty="0">
+              <a:solidFill>
+                <a:srgbClr val="2E54A1"/>
+              </a:solidFill>
+              <a:latin typeface="微软雅黑" panose="020B0503020204020204" pitchFamily="34" charset="-122"/>
+              <a:ea typeface="微软雅黑" panose="020B0503020204020204" pitchFamily="34" charset="-122"/>
+              <a:cs typeface="微软雅黑" panose="020B0503020204020204" pitchFamily="34" charset="-120"/>
+            </a:endParaRPr>
           </a:p>
         </p:txBody>
       </p:sp>
@@ -1604,7 +1144,7 @@
         </p:nvSpPr>
         <p:spPr>
           <a:xfrm>
-            <a:off x="1901952" y="3054096"/>
+            <a:off x="1901952" y="3361436"/>
             <a:ext cx="274320" cy="822960"/>
           </a:xfrm>
           <a:prstGeom prst="rightArrow">
@@ -1623,8 +1163,8 @@
         </p:nvSpPr>
         <p:spPr>
           <a:xfrm>
-            <a:off x="2194560" y="1060704"/>
-            <a:ext cx="2697480" cy="877824"/>
+            <a:off x="2194560" y="1533525"/>
+            <a:ext cx="2697480" cy="711835"/>
           </a:xfrm>
           <a:prstGeom prst="roundRect">
             <a:avLst>
@@ -1651,8 +1191,8 @@
         </p:nvSpPr>
         <p:spPr>
           <a:xfrm>
-            <a:off x="2194560" y="1060704"/>
-            <a:ext cx="2697480" cy="877824"/>
+            <a:off x="2194560" y="1463040"/>
+            <a:ext cx="2697480" cy="855980"/>
           </a:xfrm>
           <a:prstGeom prst="rect">
             <a:avLst/>
@@ -1670,7 +1210,7 @@
               <a:buNone/>
             </a:pPr>
             <a:r>
-              <a:rPr lang="en-US" sz="1900" b="1" dirty="0">
+              <a:rPr lang="en-US" b="1" dirty="0">
                 <a:solidFill>
                   <a:srgbClr val="FFFFFF"/>
                 </a:solidFill>
@@ -1678,19 +1218,10 @@
                 <a:ea typeface="微软雅黑" panose="020B0503020204020204" pitchFamily="34" charset="-122"/>
                 <a:cs typeface="微软雅黑" panose="020B0503020204020204" pitchFamily="34" charset="-120"/>
               </a:rPr>
-              <a:t>基于轻量卷积网络的</a:t>
+              <a:t>信号检测</a:t>
             </a:r>
-            <a:endParaRPr lang="en-US" sz="1900" dirty="0"/>
-          </a:p>
-          <a:p>
-            <a:pPr marL="0" indent="0" algn="ctr">
-              <a:lnSpc>
-                <a:spcPct val="95000"/>
-              </a:lnSpc>
-              <a:buNone/>
-            </a:pPr>
             <a:r>
-              <a:rPr lang="en-US" sz="1900" b="1" dirty="0">
+              <a:rPr lang="zh-CN" altLang="en-US" b="1" dirty="0">
                 <a:solidFill>
                   <a:srgbClr val="FFFFFF"/>
                 </a:solidFill>
@@ -1698,9 +1229,27 @@
                 <a:ea typeface="微软雅黑" panose="020B0503020204020204" pitchFamily="34" charset="-122"/>
                 <a:cs typeface="微软雅黑" panose="020B0503020204020204" pitchFamily="34" charset="-120"/>
               </a:rPr>
-              <a:t>知识引导信号检测</a:t>
+              <a:t>专家</a:t>
             </a:r>
-            <a:endParaRPr lang="en-US" sz="1900" dirty="0"/>
+            <a:r>
+              <a:rPr lang="zh-CN" altLang="en-US" b="1" dirty="0">
+                <a:solidFill>
+                  <a:srgbClr val="FFFFFF"/>
+                </a:solidFill>
+                <a:latin typeface="微软雅黑" panose="020B0503020204020204" pitchFamily="34" charset="-122"/>
+                <a:ea typeface="微软雅黑" panose="020B0503020204020204" pitchFamily="34" charset="-122"/>
+                <a:cs typeface="微软雅黑" panose="020B0503020204020204" pitchFamily="34" charset="-120"/>
+              </a:rPr>
+              <a:t>模型</a:t>
+            </a:r>
+            <a:endParaRPr lang="zh-CN" altLang="en-US" b="1" dirty="0">
+              <a:solidFill>
+                <a:srgbClr val="FFFFFF"/>
+              </a:solidFill>
+              <a:latin typeface="微软雅黑" panose="020B0503020204020204" pitchFamily="34" charset="-122"/>
+              <a:ea typeface="微软雅黑" panose="020B0503020204020204" pitchFamily="34" charset="-122"/>
+              <a:cs typeface="微软雅黑" panose="020B0503020204020204" pitchFamily="34" charset="-120"/>
+            </a:endParaRPr>
           </a:p>
         </p:txBody>
       </p:sp>
@@ -1712,7 +1261,7 @@
         </p:nvSpPr>
         <p:spPr>
           <a:xfrm>
-            <a:off x="2194560" y="2011680"/>
+            <a:off x="2194560" y="2319020"/>
             <a:ext cx="2697480" cy="3511296"/>
           </a:xfrm>
           <a:prstGeom prst="roundRect">
@@ -1739,8 +1288,8 @@
         </p:nvSpPr>
         <p:spPr>
           <a:xfrm>
-            <a:off x="5394960" y="1060704"/>
-            <a:ext cx="2697480" cy="877824"/>
+            <a:off x="5394960" y="1533525"/>
+            <a:ext cx="2697480" cy="710565"/>
           </a:xfrm>
           <a:prstGeom prst="roundRect">
             <a:avLst>
@@ -1767,8 +1316,8 @@
         </p:nvSpPr>
         <p:spPr>
           <a:xfrm>
-            <a:off x="5394960" y="1060704"/>
-            <a:ext cx="2697480" cy="877824"/>
+            <a:off x="5394960" y="1532255"/>
+            <a:ext cx="2697480" cy="711835"/>
           </a:xfrm>
           <a:prstGeom prst="rect">
             <a:avLst/>
@@ -1786,7 +1335,7 @@
               <a:buNone/>
             </a:pPr>
             <a:r>
-              <a:rPr lang="en-US" sz="1900" b="1" dirty="0">
+              <a:rPr lang="en-US" b="1" dirty="0">
                 <a:solidFill>
                   <a:srgbClr val="FFFFFF"/>
                 </a:solidFill>
@@ -1794,19 +1343,10 @@
                 <a:ea typeface="微软雅黑" panose="020B0503020204020204" pitchFamily="34" charset="-122"/>
                 <a:cs typeface="微软雅黑" panose="020B0503020204020204" pitchFamily="34" charset="-120"/>
               </a:rPr>
-              <a:t>基于原型网络的</a:t>
+              <a:t>小样本识别</a:t>
             </a:r>
-            <a:endParaRPr lang="en-US" sz="1900" dirty="0"/>
-          </a:p>
-          <a:p>
-            <a:pPr marL="0" indent="0" algn="ctr">
-              <a:lnSpc>
-                <a:spcPct val="95000"/>
-              </a:lnSpc>
-              <a:buNone/>
-            </a:pPr>
             <a:r>
-              <a:rPr lang="en-US" sz="1900" b="1" dirty="0">
+              <a:rPr lang="zh-CN" altLang="en-US" b="1" dirty="0">
                 <a:solidFill>
                   <a:srgbClr val="FFFFFF"/>
                 </a:solidFill>
@@ -1814,9 +1354,27 @@
                 <a:ea typeface="微软雅黑" panose="020B0503020204020204" pitchFamily="34" charset="-122"/>
                 <a:cs typeface="微软雅黑" panose="020B0503020204020204" pitchFamily="34" charset="-120"/>
               </a:rPr>
-              <a:t>知识驱动小样本分类</a:t>
+              <a:t>专家</a:t>
             </a:r>
-            <a:endParaRPr lang="en-US" sz="1900" dirty="0"/>
+            <a:r>
+              <a:rPr lang="zh-CN" altLang="en-US" b="1" dirty="0">
+                <a:solidFill>
+                  <a:srgbClr val="FFFFFF"/>
+                </a:solidFill>
+                <a:latin typeface="微软雅黑" panose="020B0503020204020204" pitchFamily="34" charset="-122"/>
+                <a:ea typeface="微软雅黑" panose="020B0503020204020204" pitchFamily="34" charset="-122"/>
+                <a:cs typeface="微软雅黑" panose="020B0503020204020204" pitchFamily="34" charset="-120"/>
+              </a:rPr>
+              <a:t>模型</a:t>
+            </a:r>
+            <a:endParaRPr lang="zh-CN" altLang="en-US" b="1" dirty="0">
+              <a:solidFill>
+                <a:srgbClr val="FFFFFF"/>
+              </a:solidFill>
+              <a:latin typeface="微软雅黑" panose="020B0503020204020204" pitchFamily="34" charset="-122"/>
+              <a:ea typeface="微软雅黑" panose="020B0503020204020204" pitchFamily="34" charset="-122"/>
+              <a:cs typeface="微软雅黑" panose="020B0503020204020204" pitchFamily="34" charset="-120"/>
+            </a:endParaRPr>
           </a:p>
         </p:txBody>
       </p:sp>
@@ -1828,7 +1386,7 @@
         </p:nvSpPr>
         <p:spPr>
           <a:xfrm>
-            <a:off x="5394960" y="2011680"/>
+            <a:off x="5394960" y="2319020"/>
             <a:ext cx="2697480" cy="3511296"/>
           </a:xfrm>
           <a:prstGeom prst="roundRect">
@@ -1855,8 +1413,8 @@
         </p:nvSpPr>
         <p:spPr>
           <a:xfrm>
-            <a:off x="8595360" y="1060704"/>
-            <a:ext cx="2697480" cy="877824"/>
+            <a:off x="8595360" y="1533525"/>
+            <a:ext cx="2697480" cy="709295"/>
           </a:xfrm>
           <a:prstGeom prst="roundRect">
             <a:avLst>
@@ -1883,7 +1441,7 @@
         </p:nvSpPr>
         <p:spPr>
           <a:xfrm>
-            <a:off x="8595360" y="1060704"/>
+            <a:off x="8620760" y="1463294"/>
             <a:ext cx="2697480" cy="877824"/>
           </a:xfrm>
           <a:prstGeom prst="rect">
@@ -1902,7 +1460,7 @@
               <a:buNone/>
             </a:pPr>
             <a:r>
-              <a:rPr lang="en-US" sz="1900" b="1" dirty="0">
+              <a:rPr lang="en-US" b="1" dirty="0">
                 <a:solidFill>
                   <a:srgbClr val="FFFFFF"/>
                 </a:solidFill>
@@ -1910,19 +1468,10 @@
                 <a:ea typeface="微软雅黑" panose="020B0503020204020204" pitchFamily="34" charset="-122"/>
                 <a:cs typeface="微软雅黑" panose="020B0503020204020204" pitchFamily="34" charset="-120"/>
               </a:rPr>
-              <a:t>知识驱动的轻量化</a:t>
+              <a:t>轨迹</a:t>
             </a:r>
-            <a:endParaRPr lang="en-US" sz="1900" dirty="0"/>
-          </a:p>
-          <a:p>
-            <a:pPr marL="0" indent="0" algn="ctr">
-              <a:lnSpc>
-                <a:spcPct val="95000"/>
-              </a:lnSpc>
-              <a:buNone/>
-            </a:pPr>
             <a:r>
-              <a:rPr lang="en-US" sz="1900" b="1" dirty="0">
+              <a:rPr lang="zh-CN" altLang="en-US" b="1" dirty="0">
                 <a:solidFill>
                   <a:srgbClr val="FFFFFF"/>
                 </a:solidFill>
@@ -1930,9 +1479,27 @@
                 <a:ea typeface="微软雅黑" panose="020B0503020204020204" pitchFamily="34" charset="-122"/>
                 <a:cs typeface="微软雅黑" panose="020B0503020204020204" pitchFamily="34" charset="-120"/>
               </a:rPr>
-              <a:t>目标轨迹估计与预测</a:t>
+              <a:t>分析专家</a:t>
             </a:r>
-            <a:endParaRPr lang="en-US" sz="1900" dirty="0"/>
+            <a:r>
+              <a:rPr lang="zh-CN" altLang="en-US" b="1" dirty="0">
+                <a:solidFill>
+                  <a:srgbClr val="FFFFFF"/>
+                </a:solidFill>
+                <a:latin typeface="微软雅黑" panose="020B0503020204020204" pitchFamily="34" charset="-122"/>
+                <a:ea typeface="微软雅黑" panose="020B0503020204020204" pitchFamily="34" charset="-122"/>
+                <a:cs typeface="微软雅黑" panose="020B0503020204020204" pitchFamily="34" charset="-120"/>
+              </a:rPr>
+              <a:t>模型</a:t>
+            </a:r>
+            <a:endParaRPr lang="zh-CN" altLang="en-US" b="1" dirty="0">
+              <a:solidFill>
+                <a:srgbClr val="FFFFFF"/>
+              </a:solidFill>
+              <a:latin typeface="微软雅黑" panose="020B0503020204020204" pitchFamily="34" charset="-122"/>
+              <a:ea typeface="微软雅黑" panose="020B0503020204020204" pitchFamily="34" charset="-122"/>
+              <a:cs typeface="微软雅黑" panose="020B0503020204020204" pitchFamily="34" charset="-120"/>
+            </a:endParaRPr>
           </a:p>
         </p:txBody>
       </p:sp>
@@ -1944,7 +1511,7 @@
         </p:nvSpPr>
         <p:spPr>
           <a:xfrm>
-            <a:off x="8595360" y="2011680"/>
+            <a:off x="8595360" y="2319020"/>
             <a:ext cx="2697480" cy="3511296"/>
           </a:xfrm>
           <a:prstGeom prst="roundRect">
@@ -1971,7 +1538,7 @@
         </p:nvSpPr>
         <p:spPr>
           <a:xfrm>
-            <a:off x="2313432" y="2103120"/>
+            <a:off x="2313432" y="2410460"/>
             <a:ext cx="2459736" cy="1645920"/>
           </a:xfrm>
           <a:prstGeom prst="roundRect">
@@ -2005,7 +1572,7 @@
         </p:nvSpPr>
         <p:spPr>
           <a:xfrm>
-            <a:off x="2350008" y="2194560"/>
+            <a:off x="2350008" y="2501900"/>
             <a:ext cx="2386584" cy="329184"/>
           </a:xfrm>
           <a:prstGeom prst="rect">
@@ -2023,7 +1590,7 @@
               <a:buNone/>
             </a:pPr>
             <a:r>
-              <a:rPr lang="en-US" sz="1600" b="1" dirty="0">
+              <a:rPr lang="zh-CN" altLang="en-US" sz="1600" b="1" dirty="0">
                 <a:solidFill>
                   <a:srgbClr val="C00000"/>
                 </a:solidFill>
@@ -2031,9 +1598,16 @@
                 <a:ea typeface="微软雅黑" panose="020B0503020204020204" pitchFamily="34" charset="-122"/>
                 <a:cs typeface="微软雅黑" panose="020B0503020204020204" pitchFamily="34" charset="-120"/>
               </a:rPr>
-              <a:t>轻量卷积特征提取</a:t>
+              <a:t>轻量卷积网络</a:t>
             </a:r>
-            <a:endParaRPr lang="en-US" sz="1600" dirty="0"/>
+            <a:endParaRPr lang="zh-CN" altLang="en-US" sz="1600" b="1" dirty="0">
+              <a:solidFill>
+                <a:srgbClr val="C00000"/>
+              </a:solidFill>
+              <a:latin typeface="微软雅黑" panose="020B0503020204020204" pitchFamily="34" charset="-122"/>
+              <a:ea typeface="微软雅黑" panose="020B0503020204020204" pitchFamily="34" charset="-122"/>
+              <a:cs typeface="微软雅黑" panose="020B0503020204020204" pitchFamily="34" charset="-120"/>
+            </a:endParaRPr>
           </a:p>
         </p:txBody>
       </p:sp>
@@ -2045,7 +1619,7 @@
         </p:nvSpPr>
         <p:spPr>
           <a:xfrm>
-            <a:off x="2383536" y="3036722"/>
+            <a:off x="2383536" y="3344062"/>
             <a:ext cx="35560" cy="172822"/>
           </a:xfrm>
           <a:prstGeom prst="rect">
@@ -2064,7 +1638,7 @@
         </p:nvSpPr>
         <p:spPr>
           <a:xfrm>
-            <a:off x="2440432" y="2902306"/>
+            <a:off x="2440432" y="3209646"/>
             <a:ext cx="35560" cy="307238"/>
           </a:xfrm>
           <a:prstGeom prst="rect">
@@ -2083,7 +1657,7 @@
         </p:nvSpPr>
         <p:spPr>
           <a:xfrm>
-            <a:off x="2497328" y="2998318"/>
+            <a:off x="2497328" y="3305658"/>
             <a:ext cx="35560" cy="211226"/>
           </a:xfrm>
           <a:prstGeom prst="rect">
@@ -2102,7 +1676,7 @@
         </p:nvSpPr>
         <p:spPr>
           <a:xfrm>
-            <a:off x="2554224" y="2825496"/>
+            <a:off x="2554224" y="3132836"/>
             <a:ext cx="35560" cy="384048"/>
           </a:xfrm>
           <a:prstGeom prst="rect">
@@ -2121,7 +1695,7 @@
         </p:nvSpPr>
         <p:spPr>
           <a:xfrm>
-            <a:off x="2611120" y="2940710"/>
+            <a:off x="2611120" y="3248050"/>
             <a:ext cx="35560" cy="268834"/>
           </a:xfrm>
           <a:prstGeom prst="rect">
@@ -2140,7 +1714,7 @@
         </p:nvSpPr>
         <p:spPr>
           <a:xfrm>
-            <a:off x="2668016" y="2863901"/>
+            <a:off x="2668016" y="3171241"/>
             <a:ext cx="35560" cy="345643"/>
           </a:xfrm>
           <a:prstGeom prst="rect">
@@ -2159,7 +1733,7 @@
         </p:nvSpPr>
         <p:spPr>
           <a:xfrm>
-            <a:off x="2724912" y="3017520"/>
+            <a:off x="2724912" y="3324860"/>
             <a:ext cx="35560" cy="192024"/>
           </a:xfrm>
           <a:prstGeom prst="rect">
@@ -2178,7 +1752,7 @@
         </p:nvSpPr>
         <p:spPr>
           <a:xfrm>
-            <a:off x="2781808" y="2909987"/>
+            <a:off x="2781808" y="3217327"/>
             <a:ext cx="35560" cy="299557"/>
           </a:xfrm>
           <a:prstGeom prst="rect">
@@ -2197,7 +1771,7 @@
         </p:nvSpPr>
         <p:spPr>
           <a:xfrm>
-            <a:off x="2838704" y="3055925"/>
+            <a:off x="2838704" y="3363265"/>
             <a:ext cx="35560" cy="153619"/>
           </a:xfrm>
           <a:prstGeom prst="rect">
@@ -2216,7 +1790,7 @@
         </p:nvSpPr>
         <p:spPr>
           <a:xfrm>
-            <a:off x="2372868" y="3209544"/>
+            <a:off x="2372868" y="3516884"/>
             <a:ext cx="512064" cy="0"/>
           </a:xfrm>
           <a:prstGeom prst="line">
@@ -2239,7 +1813,7 @@
         </p:nvSpPr>
         <p:spPr>
           <a:xfrm>
-            <a:off x="2253996" y="3291840"/>
+            <a:off x="2253996" y="3599180"/>
             <a:ext cx="749808" cy="237744"/>
           </a:xfrm>
           <a:prstGeom prst="rect">
@@ -2265,7 +1839,7 @@
                 <a:ea typeface="微软雅黑" panose="020B0503020204020204" pitchFamily="34" charset="-122"/>
                 <a:cs typeface="微软雅黑" panose="020B0503020204020204" pitchFamily="34" charset="-120"/>
               </a:rPr>
-              <a:t>时频图</a:t>
+              <a:t>时频谱</a:t>
             </a:r>
             <a:endParaRPr lang="en-US" sz="1200" b="1" dirty="0">
               <a:solidFill>
@@ -2286,7 +1860,7 @@
         </p:nvSpPr>
         <p:spPr>
           <a:xfrm>
-            <a:off x="2884805" y="2948940"/>
+            <a:off x="2884805" y="3256280"/>
             <a:ext cx="146304" cy="137160"/>
           </a:xfrm>
           <a:prstGeom prst="rightArrow">
@@ -2299,42 +1873,14 @@
       </p:sp>
       <p:sp>
         <p:nvSpPr>
-          <p:cNvPr id="56" name="Shape 53"/>
-          <p:cNvSpPr/>
-          <p:nvPr/>
-        </p:nvSpPr>
-        <p:spPr>
-          <a:xfrm>
-            <a:off x="3049524" y="2843784"/>
-            <a:ext cx="987552" cy="347472"/>
-          </a:xfrm>
-          <a:prstGeom prst="roundRect">
-            <a:avLst>
-              <a:gd name="adj" fmla="val 13158"/>
-            </a:avLst>
-          </a:prstGeom>
-          <a:solidFill>
-            <a:srgbClr val="2E54A1"/>
-          </a:solidFill>
-          <a:effectLst>
-            <a:outerShdw blurRad="38100" dist="12700" dir="5400000" algn="bl" rotWithShape="0">
-              <a:srgbClr val="000000">
-                <a:alpha val="16000"/>
-              </a:srgbClr>
-            </a:outerShdw>
-          </a:effectLst>
-        </p:spPr>
-      </p:sp>
-      <p:sp>
-        <p:nvSpPr>
-          <p:cNvPr id="57" name="Text 54"/>
-          <p:cNvSpPr/>
-          <p:nvPr/>
-        </p:nvSpPr>
-        <p:spPr>
-          <a:xfrm>
-            <a:off x="3049524" y="2843784"/>
-            <a:ext cx="987552" cy="347472"/>
+          <p:cNvPr id="58" name="Text 55"/>
+          <p:cNvSpPr/>
+          <p:nvPr/>
+        </p:nvSpPr>
+        <p:spPr>
+          <a:xfrm>
+            <a:off x="3212846" y="3654425"/>
+            <a:ext cx="749808" cy="237744"/>
           </a:xfrm>
           <a:prstGeom prst="rect">
             <a:avLst/>
@@ -2342,7 +1888,7 @@
           <a:noFill/>
         </p:spPr>
         <p:txBody>
-          <a:bodyPr wrap="square" lIns="0" tIns="0" rIns="0" bIns="0" rtlCol="0" anchor="ctr">
+          <a:bodyPr wrap="square" lIns="0" tIns="0" rIns="0" bIns="0" rtlCol="0" anchor="t">
             <a:normAutofit/>
           </a:bodyPr>
           <a:lstStyle/>
@@ -2351,29 +1897,121 @@
               <a:buNone/>
             </a:pPr>
             <a:r>
-              <a:rPr lang="en-US" sz="1000" b="1" dirty="0">
+              <a:rPr lang="zh-CN" altLang="en-US" sz="1400" b="1" dirty="0">
                 <a:solidFill>
-                  <a:srgbClr val="FFFFFF"/>
+                  <a:schemeClr val="accent1">
+                    <a:lumMod val="75000"/>
+                  </a:schemeClr>
                 </a:solidFill>
                 <a:latin typeface="微软雅黑" panose="020B0503020204020204" pitchFamily="34" charset="-122"/>
                 <a:ea typeface="微软雅黑" panose="020B0503020204020204" pitchFamily="34" charset="-122"/>
                 <a:cs typeface="微软雅黑" panose="020B0503020204020204" pitchFamily="34" charset="-120"/>
               </a:rPr>
-              <a:t>MobileNetV3</a:t>
+              <a:t>卷积网络</a:t>
             </a:r>
-            <a:endParaRPr lang="en-US" sz="1000" dirty="0"/>
+            <a:endParaRPr lang="zh-CN" altLang="en-US" sz="1400" b="1" dirty="0">
+              <a:solidFill>
+                <a:schemeClr val="accent1">
+                  <a:lumMod val="75000"/>
+                </a:schemeClr>
+              </a:solidFill>
+              <a:latin typeface="微软雅黑" panose="020B0503020204020204" pitchFamily="34" charset="-122"/>
+              <a:ea typeface="微软雅黑" panose="020B0503020204020204" pitchFamily="34" charset="-122"/>
+              <a:cs typeface="微软雅黑" panose="020B0503020204020204" pitchFamily="34" charset="-120"/>
+            </a:endParaRPr>
           </a:p>
         </p:txBody>
       </p:sp>
       <p:sp>
         <p:nvSpPr>
-          <p:cNvPr id="58" name="Text 55"/>
-          <p:cNvSpPr/>
-          <p:nvPr/>
-        </p:nvSpPr>
-        <p:spPr>
-          <a:xfrm>
-            <a:off x="3168396" y="3291840"/>
+          <p:cNvPr id="61" name="Shape 58"/>
+          <p:cNvSpPr/>
+          <p:nvPr/>
+        </p:nvSpPr>
+        <p:spPr>
+          <a:xfrm>
+            <a:off x="4256151" y="3260725"/>
+            <a:ext cx="137160" cy="137160"/>
+          </a:xfrm>
+          <a:prstGeom prst="roundRect">
+            <a:avLst>
+              <a:gd name="adj" fmla="val 13333"/>
+            </a:avLst>
+          </a:prstGeom>
+          <a:solidFill>
+            <a:srgbClr val="4874CB"/>
+          </a:solidFill>
+          <a:ln w="9525">
+            <a:solidFill>
+              <a:srgbClr val="FFFFFF"/>
+            </a:solidFill>
+            <a:prstDash val="solid"/>
+          </a:ln>
+        </p:spPr>
+      </p:sp>
+      <p:sp>
+        <p:nvSpPr>
+          <p:cNvPr id="62" name="Shape 59"/>
+          <p:cNvSpPr/>
+          <p:nvPr/>
+        </p:nvSpPr>
+        <p:spPr>
+          <a:xfrm>
+            <a:off x="4425315" y="3260725"/>
+            <a:ext cx="137160" cy="137160"/>
+          </a:xfrm>
+          <a:prstGeom prst="roundRect">
+            <a:avLst>
+              <a:gd name="adj" fmla="val 13333"/>
+            </a:avLst>
+          </a:prstGeom>
+          <a:solidFill>
+            <a:srgbClr val="159A8C"/>
+          </a:solidFill>
+          <a:ln w="9525">
+            <a:solidFill>
+              <a:srgbClr val="FFFFFF"/>
+            </a:solidFill>
+            <a:prstDash val="solid"/>
+          </a:ln>
+        </p:spPr>
+      </p:sp>
+      <p:sp>
+        <p:nvSpPr>
+          <p:cNvPr id="63" name="Shape 60"/>
+          <p:cNvSpPr/>
+          <p:nvPr/>
+        </p:nvSpPr>
+        <p:spPr>
+          <a:xfrm>
+            <a:off x="4594479" y="3260725"/>
+            <a:ext cx="137160" cy="137160"/>
+          </a:xfrm>
+          <a:prstGeom prst="roundRect">
+            <a:avLst>
+              <a:gd name="adj" fmla="val 13333"/>
+            </a:avLst>
+          </a:prstGeom>
+          <a:solidFill>
+            <a:srgbClr val="C00000"/>
+          </a:solidFill>
+          <a:ln w="9525">
+            <a:solidFill>
+              <a:srgbClr val="FFFFFF"/>
+            </a:solidFill>
+            <a:prstDash val="solid"/>
+          </a:ln>
+        </p:spPr>
+      </p:sp>
+      <p:sp>
+        <p:nvSpPr>
+          <p:cNvPr id="65" name="Text 62"/>
+          <p:cNvSpPr/>
+          <p:nvPr/>
+        </p:nvSpPr>
+        <p:spPr>
+          <a:xfrm>
+            <a:off x="4082796" y="3599180"/>
             <a:ext cx="749808" cy="237744"/>
           </a:xfrm>
           <a:prstGeom prst="rect">
@@ -2399,7 +2037,7 @@
                 <a:ea typeface="微软雅黑" panose="020B0503020204020204" pitchFamily="34" charset="-122"/>
                 <a:cs typeface="微软雅黑" panose="020B0503020204020204" pitchFamily="34" charset="-120"/>
               </a:rPr>
-              <a:t>轻量网络</a:t>
+              <a:t>通用特征</a:t>
             </a:r>
             <a:endParaRPr lang="en-US" sz="1200" b="1" dirty="0">
               <a:solidFill>
@@ -2414,141 +2052,13 @@
       </p:sp>
       <p:sp>
         <p:nvSpPr>
-          <p:cNvPr id="61" name="Shape 58"/>
-          <p:cNvSpPr/>
-          <p:nvPr/>
-        </p:nvSpPr>
-        <p:spPr>
-          <a:xfrm>
-            <a:off x="4256151" y="2953385"/>
-            <a:ext cx="137160" cy="137160"/>
-          </a:xfrm>
-          <a:prstGeom prst="roundRect">
-            <a:avLst>
-              <a:gd name="adj" fmla="val 13333"/>
-            </a:avLst>
-          </a:prstGeom>
-          <a:solidFill>
-            <a:srgbClr val="4874CB"/>
-          </a:solidFill>
-          <a:ln w="9525">
-            <a:solidFill>
-              <a:srgbClr val="FFFFFF"/>
-            </a:solidFill>
-            <a:prstDash val="solid"/>
-          </a:ln>
-        </p:spPr>
-      </p:sp>
-      <p:sp>
-        <p:nvSpPr>
-          <p:cNvPr id="62" name="Shape 59"/>
-          <p:cNvSpPr/>
-          <p:nvPr/>
-        </p:nvSpPr>
-        <p:spPr>
-          <a:xfrm>
-            <a:off x="4425315" y="2953385"/>
-            <a:ext cx="137160" cy="137160"/>
-          </a:xfrm>
-          <a:prstGeom prst="roundRect">
-            <a:avLst>
-              <a:gd name="adj" fmla="val 13333"/>
-            </a:avLst>
-          </a:prstGeom>
-          <a:solidFill>
-            <a:srgbClr val="159A8C"/>
-          </a:solidFill>
-          <a:ln w="9525">
-            <a:solidFill>
-              <a:srgbClr val="FFFFFF"/>
-            </a:solidFill>
-            <a:prstDash val="solid"/>
-          </a:ln>
-        </p:spPr>
-      </p:sp>
-      <p:sp>
-        <p:nvSpPr>
-          <p:cNvPr id="63" name="Shape 60"/>
-          <p:cNvSpPr/>
-          <p:nvPr/>
-        </p:nvSpPr>
-        <p:spPr>
-          <a:xfrm>
-            <a:off x="4594479" y="2953385"/>
-            <a:ext cx="137160" cy="137160"/>
-          </a:xfrm>
-          <a:prstGeom prst="roundRect">
-            <a:avLst>
-              <a:gd name="adj" fmla="val 13333"/>
-            </a:avLst>
-          </a:prstGeom>
-          <a:solidFill>
-            <a:srgbClr val="C00000"/>
-          </a:solidFill>
-          <a:ln w="9525">
-            <a:solidFill>
-              <a:srgbClr val="FFFFFF"/>
-            </a:solidFill>
-            <a:prstDash val="solid"/>
-          </a:ln>
-        </p:spPr>
-      </p:sp>
-      <p:sp>
-        <p:nvSpPr>
-          <p:cNvPr id="65" name="Text 62"/>
-          <p:cNvSpPr/>
-          <p:nvPr/>
-        </p:nvSpPr>
-        <p:spPr>
-          <a:xfrm>
-            <a:off x="4082796" y="3291840"/>
-            <a:ext cx="749808" cy="237744"/>
-          </a:xfrm>
-          <a:prstGeom prst="rect">
-            <a:avLst/>
-          </a:prstGeom>
-          <a:noFill/>
-        </p:spPr>
-        <p:txBody>
-          <a:bodyPr wrap="square" lIns="0" tIns="0" rIns="0" bIns="0" rtlCol="0" anchor="t">
-            <a:normAutofit/>
-          </a:bodyPr>
-          <a:lstStyle/>
-          <a:p>
-            <a:pPr marL="0" indent="0" algn="ctr">
-              <a:buNone/>
-            </a:pPr>
-            <a:r>
-              <a:rPr lang="en-US" sz="1200" b="1" dirty="0">
-                <a:solidFill>
-                  <a:schemeClr val="tx1"/>
-                </a:solidFill>
-                <a:latin typeface="微软雅黑" panose="020B0503020204020204" pitchFamily="34" charset="-122"/>
-                <a:ea typeface="微软雅黑" panose="020B0503020204020204" pitchFamily="34" charset="-122"/>
-                <a:cs typeface="微软雅黑" panose="020B0503020204020204" pitchFamily="34" charset="-120"/>
-              </a:rPr>
-              <a:t>特征向量</a:t>
-            </a:r>
-            <a:endParaRPr lang="en-US" sz="1200" b="1" dirty="0">
-              <a:solidFill>
-                <a:schemeClr val="tx1"/>
-              </a:solidFill>
-              <a:latin typeface="微软雅黑" panose="020B0503020204020204" pitchFamily="34" charset="-122"/>
-              <a:ea typeface="微软雅黑" panose="020B0503020204020204" pitchFamily="34" charset="-122"/>
-              <a:cs typeface="微软雅黑" panose="020B0503020204020204" pitchFamily="34" charset="-120"/>
-            </a:endParaRPr>
-          </a:p>
-        </p:txBody>
-      </p:sp>
-      <p:sp>
-        <p:nvSpPr>
           <p:cNvPr id="66" name="Shape 63"/>
           <p:cNvSpPr/>
           <p:nvPr/>
         </p:nvSpPr>
         <p:spPr>
           <a:xfrm>
-            <a:off x="2313432" y="3877056"/>
+            <a:off x="2313432" y="4184396"/>
             <a:ext cx="2459736" cy="1645920"/>
           </a:xfrm>
           <a:prstGeom prst="roundRect">
@@ -2582,7 +2092,7 @@
         </p:nvSpPr>
         <p:spPr>
           <a:xfrm>
-            <a:off x="2350008" y="3968496"/>
+            <a:off x="2350008" y="4275836"/>
             <a:ext cx="2386584" cy="329184"/>
           </a:xfrm>
           <a:prstGeom prst="rect">
@@ -2600,7 +2110,7 @@
               <a:buNone/>
             </a:pPr>
             <a:r>
-              <a:rPr lang="en-US" sz="1600" b="1" dirty="0">
+              <a:rPr lang="zh-CN" altLang="en-US" sz="1600" b="1" dirty="0">
                 <a:solidFill>
                   <a:srgbClr val="C00000"/>
                 </a:solidFill>
@@ -2608,9 +2118,16 @@
                 <a:ea typeface="微软雅黑" panose="020B0503020204020204" pitchFamily="34" charset="-122"/>
                 <a:cs typeface="微软雅黑" panose="020B0503020204020204" pitchFamily="34" charset="-120"/>
               </a:rPr>
-              <a:t>知识门控有无判决</a:t>
+              <a:t>信号检测</a:t>
             </a:r>
-            <a:endParaRPr lang="en-US" sz="1600" dirty="0"/>
+            <a:endParaRPr lang="zh-CN" altLang="en-US" sz="1600" b="1" dirty="0">
+              <a:solidFill>
+                <a:srgbClr val="C00000"/>
+              </a:solidFill>
+              <a:latin typeface="微软雅黑" panose="020B0503020204020204" pitchFamily="34" charset="-122"/>
+              <a:ea typeface="微软雅黑" panose="020B0503020204020204" pitchFamily="34" charset="-122"/>
+              <a:cs typeface="微软雅黑" panose="020B0503020204020204" pitchFamily="34" charset="-120"/>
+            </a:endParaRPr>
           </a:p>
         </p:txBody>
       </p:sp>
@@ -2623,14 +2140,14 @@
           <p:nvPr/>
         </p:nvPicPr>
         <p:blipFill>
-          <a:blip r:embed="rId2"/>
+          <a:blip r:embed="rId1"/>
           <a:stretch>
             <a:fillRect/>
           </a:stretch>
         </p:blipFill>
         <p:spPr>
           <a:xfrm>
-            <a:off x="2482596" y="4553712"/>
+            <a:off x="2482596" y="4861052"/>
             <a:ext cx="475488" cy="475488"/>
           </a:xfrm>
           <a:prstGeom prst="rect">
@@ -2646,7 +2163,7 @@
         </p:nvSpPr>
         <p:spPr>
           <a:xfrm>
-            <a:off x="2345436" y="5065776"/>
+            <a:off x="2345436" y="5373116"/>
             <a:ext cx="749808" cy="237744"/>
           </a:xfrm>
           <a:prstGeom prst="rect">
@@ -2693,7 +2210,7 @@
         </p:nvSpPr>
         <p:spPr>
           <a:xfrm>
-            <a:off x="3023235" y="4723130"/>
+            <a:off x="3023235" y="5030470"/>
             <a:ext cx="189865" cy="137160"/>
           </a:xfrm>
           <a:prstGeom prst="rightArrow">
@@ -2703,10 +2220,85 @@
             <a:srgbClr val="5B6470"/>
           </a:solidFill>
         </p:spPr>
+      </p:sp>
+      <p:sp>
+        <p:nvSpPr>
+          <p:cNvPr id="72" name="Text 67"/>
+          <p:cNvSpPr/>
+          <p:nvPr/>
+        </p:nvSpPr>
+        <p:spPr>
+          <a:xfrm>
+            <a:off x="3111246" y="5373116"/>
+            <a:ext cx="749808" cy="237744"/>
+          </a:xfrm>
+          <a:prstGeom prst="rect">
+            <a:avLst/>
+          </a:prstGeom>
+          <a:noFill/>
+        </p:spPr>
+        <p:txBody>
+          <a:bodyPr wrap="square" lIns="0" tIns="0" rIns="0" bIns="0" rtlCol="0" anchor="t">
+            <a:normAutofit/>
+          </a:bodyPr>
+          <a:lstStyle/>
+          <a:p>
+            <a:pPr marL="0" indent="0" algn="ctr">
+              <a:buNone/>
+            </a:pPr>
+            <a:r>
+              <a:rPr lang="en-US" sz="1400" b="1" dirty="0">
+                <a:solidFill>
+                  <a:schemeClr val="accent1">
+                    <a:lumMod val="75000"/>
+                  </a:schemeClr>
+                </a:solidFill>
+                <a:latin typeface="微软雅黑" panose="020B0503020204020204" pitchFamily="34" charset="-122"/>
+                <a:ea typeface="微软雅黑" panose="020B0503020204020204" pitchFamily="34" charset="-122"/>
+                <a:cs typeface="微软雅黑" panose="020B0503020204020204" pitchFamily="34" charset="-120"/>
+              </a:rPr>
+              <a:t>知识门控</a:t>
+            </a:r>
+            <a:endParaRPr lang="en-US" sz="1400" b="1" dirty="0">
+              <a:solidFill>
+                <a:schemeClr val="accent1">
+                  <a:lumMod val="75000"/>
+                </a:schemeClr>
+              </a:solidFill>
+              <a:latin typeface="微软雅黑" panose="020B0503020204020204" pitchFamily="34" charset="-122"/>
+              <a:ea typeface="微软雅黑" panose="020B0503020204020204" pitchFamily="34" charset="-122"/>
+              <a:cs typeface="微软雅黑" panose="020B0503020204020204" pitchFamily="34" charset="-120"/>
+            </a:endParaRPr>
+          </a:p>
+        </p:txBody>
       </p:sp>
       <p:pic>
         <p:nvPicPr>
-          <p:cNvPr id="71" name="Image 2" descr="preencoded.png"/>
+          <p:cNvPr id="74" name="Image 3" descr="preencoded.png"/>
+          <p:cNvPicPr>
+            <a:picLocks noChangeAspect="1"/>
+          </p:cNvPicPr>
+          <p:nvPr/>
+        </p:nvPicPr>
+        <p:blipFill>
+          <a:blip r:embed="rId2"/>
+          <a:stretch>
+            <a:fillRect/>
+          </a:stretch>
+        </p:blipFill>
+        <p:spPr>
+          <a:xfrm>
+            <a:off x="4128516" y="4979924"/>
+            <a:ext cx="219456" cy="219456"/>
+          </a:xfrm>
+          <a:prstGeom prst="rect">
+            <a:avLst/>
+          </a:prstGeom>
+        </p:spPr>
+      </p:pic>
+      <p:pic>
+        <p:nvPicPr>
+          <p:cNvPr id="75" name="Image 4" descr="preencoded.png"/>
           <p:cNvPicPr>
             <a:picLocks noChangeAspect="1"/>
           </p:cNvPicPr>
@@ -2720,8 +2312,8 @@
         </p:blipFill>
         <p:spPr>
           <a:xfrm>
-            <a:off x="3305556" y="4553712"/>
-            <a:ext cx="475488" cy="475488"/>
+            <a:off x="4393692" y="4979924"/>
+            <a:ext cx="219456" cy="219456"/>
           </a:xfrm>
           <a:prstGeom prst="rect">
             <a:avLst/>
@@ -2730,13 +2322,13 @@
       </p:pic>
       <p:sp>
         <p:nvSpPr>
-          <p:cNvPr id="72" name="Text 67"/>
-          <p:cNvSpPr/>
-          <p:nvPr/>
-        </p:nvSpPr>
-        <p:spPr>
-          <a:xfrm>
-            <a:off x="3168396" y="5065776"/>
+          <p:cNvPr id="76" name="Text 69"/>
+          <p:cNvSpPr/>
+          <p:nvPr/>
+        </p:nvSpPr>
+        <p:spPr>
+          <a:xfrm>
+            <a:off x="3991356" y="5373116"/>
             <a:ext cx="749808" cy="237744"/>
           </a:xfrm>
           <a:prstGeom prst="rect">
@@ -2746,7 +2338,7 @@
         </p:spPr>
         <p:txBody>
           <a:bodyPr wrap="square" lIns="0" tIns="0" rIns="0" bIns="0" rtlCol="0" anchor="t">
-            <a:normAutofit/>
+            <a:normAutofit fontScale="90000"/>
           </a:bodyPr>
           <a:lstStyle/>
           <a:p>
@@ -2762,7 +2354,7 @@
                 <a:ea typeface="微软雅黑" panose="020B0503020204020204" pitchFamily="34" charset="-122"/>
                 <a:cs typeface="微软雅黑" panose="020B0503020204020204" pitchFamily="34" charset="-120"/>
               </a:rPr>
-              <a:t>知识门控</a:t>
+              <a:t>弱信号检出</a:t>
             </a:r>
             <a:endParaRPr lang="en-US" sz="1200" b="1" dirty="0">
               <a:solidFill>
@@ -2775,101 +2367,6 @@
           </a:p>
         </p:txBody>
       </p:sp>
-      <p:pic>
-        <p:nvPicPr>
-          <p:cNvPr id="74" name="Image 3" descr="preencoded.png"/>
-          <p:cNvPicPr>
-            <a:picLocks noChangeAspect="1"/>
-          </p:cNvPicPr>
-          <p:nvPr/>
-        </p:nvPicPr>
-        <p:blipFill>
-          <a:blip r:embed="rId4"/>
-          <a:stretch>
-            <a:fillRect/>
-          </a:stretch>
-        </p:blipFill>
-        <p:spPr>
-          <a:xfrm>
-            <a:off x="4128516" y="4672584"/>
-            <a:ext cx="219456" cy="219456"/>
-          </a:xfrm>
-          <a:prstGeom prst="rect">
-            <a:avLst/>
-          </a:prstGeom>
-        </p:spPr>
-      </p:pic>
-      <p:pic>
-        <p:nvPicPr>
-          <p:cNvPr id="75" name="Image 4" descr="preencoded.png"/>
-          <p:cNvPicPr>
-            <a:picLocks noChangeAspect="1"/>
-          </p:cNvPicPr>
-          <p:nvPr/>
-        </p:nvPicPr>
-        <p:blipFill>
-          <a:blip r:embed="rId5"/>
-          <a:stretch>
-            <a:fillRect/>
-          </a:stretch>
-        </p:blipFill>
-        <p:spPr>
-          <a:xfrm>
-            <a:off x="4393692" y="4672584"/>
-            <a:ext cx="219456" cy="219456"/>
-          </a:xfrm>
-          <a:prstGeom prst="rect">
-            <a:avLst/>
-          </a:prstGeom>
-        </p:spPr>
-      </p:pic>
-      <p:sp>
-        <p:nvSpPr>
-          <p:cNvPr id="76" name="Text 69"/>
-          <p:cNvSpPr/>
-          <p:nvPr/>
-        </p:nvSpPr>
-        <p:spPr>
-          <a:xfrm>
-            <a:off x="3991356" y="5065776"/>
-            <a:ext cx="749808" cy="237744"/>
-          </a:xfrm>
-          <a:prstGeom prst="rect">
-            <a:avLst/>
-          </a:prstGeom>
-          <a:noFill/>
-        </p:spPr>
-        <p:txBody>
-          <a:bodyPr wrap="square" lIns="0" tIns="0" rIns="0" bIns="0" rtlCol="0" anchor="t">
-            <a:normAutofit/>
-          </a:bodyPr>
-          <a:lstStyle/>
-          <a:p>
-            <a:pPr marL="0" indent="0" algn="ctr">
-              <a:buNone/>
-            </a:pPr>
-            <a:r>
-              <a:rPr lang="en-US" sz="1200" b="1" dirty="0">
-                <a:solidFill>
-                  <a:schemeClr val="tx1"/>
-                </a:solidFill>
-                <a:latin typeface="微软雅黑" panose="020B0503020204020204" pitchFamily="34" charset="-122"/>
-                <a:ea typeface="微软雅黑" panose="020B0503020204020204" pitchFamily="34" charset="-122"/>
-                <a:cs typeface="微软雅黑" panose="020B0503020204020204" pitchFamily="34" charset="-120"/>
-              </a:rPr>
-              <a:t>有无判决</a:t>
-            </a:r>
-            <a:endParaRPr lang="en-US" sz="1200" b="1" dirty="0">
-              <a:solidFill>
-                <a:schemeClr val="tx1"/>
-              </a:solidFill>
-              <a:latin typeface="微软雅黑" panose="020B0503020204020204" pitchFamily="34" charset="-122"/>
-              <a:ea typeface="微软雅黑" panose="020B0503020204020204" pitchFamily="34" charset="-122"/>
-              <a:cs typeface="微软雅黑" panose="020B0503020204020204" pitchFamily="34" charset="-120"/>
-            </a:endParaRPr>
-          </a:p>
-        </p:txBody>
-      </p:sp>
       <p:sp>
         <p:nvSpPr>
           <p:cNvPr id="77" name="Shape 70"/>
@@ -2878,7 +2375,7 @@
         </p:nvSpPr>
         <p:spPr>
           <a:xfrm>
-            <a:off x="5513832" y="2103120"/>
+            <a:off x="5513832" y="2410460"/>
             <a:ext cx="2459736" cy="1645920"/>
           </a:xfrm>
           <a:prstGeom prst="roundRect">
@@ -2912,7 +2409,7 @@
         </p:nvSpPr>
         <p:spPr>
           <a:xfrm>
-            <a:off x="5550408" y="2194560"/>
+            <a:off x="5550408" y="2501900"/>
             <a:ext cx="2386584" cy="329184"/>
           </a:xfrm>
           <a:prstGeom prst="rect">
@@ -2938,9 +2435,27 @@
                 <a:ea typeface="微软雅黑" panose="020B0503020204020204" pitchFamily="34" charset="-122"/>
                 <a:cs typeface="微软雅黑" panose="020B0503020204020204" pitchFamily="34" charset="-120"/>
               </a:rPr>
-              <a:t>小样本原型学习</a:t>
+              <a:t>原型</a:t>
             </a:r>
-            <a:endParaRPr lang="en-US" sz="1600" dirty="0"/>
+            <a:r>
+              <a:rPr lang="zh-CN" altLang="en-US" sz="1600" b="1" dirty="0">
+                <a:solidFill>
+                  <a:srgbClr val="C00000"/>
+                </a:solidFill>
+                <a:latin typeface="微软雅黑" panose="020B0503020204020204" pitchFamily="34" charset="-122"/>
+                <a:ea typeface="微软雅黑" panose="020B0503020204020204" pitchFamily="34" charset="-122"/>
+                <a:cs typeface="微软雅黑" panose="020B0503020204020204" pitchFamily="34" charset="-120"/>
+              </a:rPr>
+              <a:t>网络</a:t>
+            </a:r>
+            <a:endParaRPr lang="zh-CN" altLang="en-US" sz="1600" b="1" dirty="0">
+              <a:solidFill>
+                <a:srgbClr val="C00000"/>
+              </a:solidFill>
+              <a:latin typeface="微软雅黑" panose="020B0503020204020204" pitchFamily="34" charset="-122"/>
+              <a:ea typeface="微软雅黑" panose="020B0503020204020204" pitchFamily="34" charset="-122"/>
+              <a:cs typeface="微软雅黑" panose="020B0503020204020204" pitchFamily="34" charset="-120"/>
+            </a:endParaRPr>
           </a:p>
         </p:txBody>
       </p:sp>
@@ -2953,14 +2468,14 @@
           <p:nvPr/>
         </p:nvPicPr>
         <p:blipFill>
-          <a:blip r:embed="rId6"/>
+          <a:blip r:embed="rId4"/>
           <a:stretch>
             <a:fillRect/>
           </a:stretch>
         </p:blipFill>
         <p:spPr>
           <a:xfrm>
-            <a:off x="5682996" y="2779776"/>
+            <a:off x="5682996" y="3087116"/>
             <a:ext cx="475488" cy="475488"/>
           </a:xfrm>
           <a:prstGeom prst="rect">
@@ -2976,7 +2491,7 @@
         </p:nvSpPr>
         <p:spPr>
           <a:xfrm>
-            <a:off x="5545836" y="3291840"/>
+            <a:off x="5545836" y="3599180"/>
             <a:ext cx="749808" cy="237744"/>
           </a:xfrm>
           <a:prstGeom prst="rect">
@@ -3023,8 +2538,78 @@
         </p:nvSpPr>
         <p:spPr>
           <a:xfrm>
-            <a:off x="6223000" y="2953385"/>
+            <a:off x="6223000" y="3260725"/>
             <a:ext cx="187325" cy="137160"/>
+          </a:xfrm>
+          <a:prstGeom prst="rightArrow">
+            <a:avLst/>
+          </a:prstGeom>
+          <a:solidFill>
+            <a:srgbClr val="5B6470"/>
+          </a:solidFill>
+        </p:spPr>
+      </p:sp>
+      <p:sp>
+        <p:nvSpPr>
+          <p:cNvPr id="83" name="Text 74"/>
+          <p:cNvSpPr/>
+          <p:nvPr/>
+        </p:nvSpPr>
+        <p:spPr>
+          <a:xfrm>
+            <a:off x="6409436" y="3614420"/>
+            <a:ext cx="749808" cy="237744"/>
+          </a:xfrm>
+          <a:prstGeom prst="rect">
+            <a:avLst/>
+          </a:prstGeom>
+          <a:noFill/>
+        </p:spPr>
+        <p:txBody>
+          <a:bodyPr wrap="square" lIns="0" tIns="0" rIns="0" bIns="0" rtlCol="0" anchor="t">
+            <a:normAutofit/>
+          </a:bodyPr>
+          <a:lstStyle/>
+          <a:p>
+            <a:pPr marL="0" indent="0" algn="ctr">
+              <a:buNone/>
+            </a:pPr>
+            <a:r>
+              <a:rPr lang="zh-CN" altLang="en-US" sz="1400" b="1" dirty="0">
+                <a:solidFill>
+                  <a:schemeClr val="accent1">
+                    <a:lumMod val="75000"/>
+                  </a:schemeClr>
+                </a:solidFill>
+                <a:latin typeface="微软雅黑" panose="020B0503020204020204" pitchFamily="34" charset="-122"/>
+                <a:ea typeface="微软雅黑" panose="020B0503020204020204" pitchFamily="34" charset="-122"/>
+                <a:cs typeface="微软雅黑" panose="020B0503020204020204" pitchFamily="34" charset="-120"/>
+              </a:rPr>
+              <a:t>原型网络</a:t>
+            </a:r>
+            <a:endParaRPr lang="zh-CN" altLang="en-US" sz="1400" b="1" dirty="0">
+              <a:solidFill>
+                <a:schemeClr val="accent1">
+                  <a:lumMod val="75000"/>
+                </a:schemeClr>
+              </a:solidFill>
+              <a:latin typeface="微软雅黑" panose="020B0503020204020204" pitchFamily="34" charset="-122"/>
+              <a:ea typeface="微软雅黑" panose="020B0503020204020204" pitchFamily="34" charset="-122"/>
+              <a:cs typeface="微软雅黑" panose="020B0503020204020204" pitchFamily="34" charset="-120"/>
+            </a:endParaRPr>
+          </a:p>
+        </p:txBody>
+      </p:sp>
+      <p:sp>
+        <p:nvSpPr>
+          <p:cNvPr id="84" name="Shape 75"/>
+          <p:cNvSpPr/>
+          <p:nvPr/>
+        </p:nvSpPr>
+        <p:spPr>
+          <a:xfrm>
+            <a:off x="7062470" y="3256280"/>
+            <a:ext cx="189865" cy="137160"/>
           </a:xfrm>
           <a:prstGeom prst="rightArrow">
             <a:avLst/>
@@ -3036,21 +2621,21 @@
       </p:sp>
       <p:pic>
         <p:nvPicPr>
-          <p:cNvPr id="82" name="Image 6" descr="preencoded.png"/>
+          <p:cNvPr id="85" name="Image 7" descr="preencoded.png"/>
           <p:cNvPicPr>
             <a:picLocks noChangeAspect="1"/>
           </p:cNvPicPr>
           <p:nvPr/>
         </p:nvPicPr>
         <p:blipFill>
-          <a:blip r:embed="rId2"/>
+          <a:blip r:embed="rId5"/>
           <a:stretch>
             <a:fillRect/>
           </a:stretch>
         </p:blipFill>
         <p:spPr>
           <a:xfrm>
-            <a:off x="6505956" y="2779776"/>
+            <a:off x="7328916" y="3087116"/>
             <a:ext cx="475488" cy="475488"/>
           </a:xfrm>
           <a:prstGeom prst="rect">
@@ -3060,13 +2645,13 @@
       </p:pic>
       <p:sp>
         <p:nvSpPr>
-          <p:cNvPr id="83" name="Text 74"/>
-          <p:cNvSpPr/>
-          <p:nvPr/>
-        </p:nvSpPr>
-        <p:spPr>
-          <a:xfrm>
-            <a:off x="6368796" y="3291840"/>
+          <p:cNvPr id="86" name="Text 76"/>
+          <p:cNvSpPr/>
+          <p:nvPr/>
+        </p:nvSpPr>
+        <p:spPr>
+          <a:xfrm>
+            <a:off x="7191756" y="3599180"/>
             <a:ext cx="749808" cy="237744"/>
           </a:xfrm>
           <a:prstGeom prst="rect">
@@ -3092,7 +2677,7 @@
                 <a:ea typeface="微软雅黑" panose="020B0503020204020204" pitchFamily="34" charset="-122"/>
                 <a:cs typeface="微软雅黑" panose="020B0503020204020204" pitchFamily="34" charset="-120"/>
               </a:rPr>
-              <a:t>知识先验</a:t>
+              <a:t>类原型</a:t>
             </a:r>
             <a:endParaRPr lang="en-US" sz="1200" b="1" dirty="0">
               <a:solidFill>
@@ -3107,103 +2692,13 @@
       </p:sp>
       <p:sp>
         <p:nvSpPr>
-          <p:cNvPr id="84" name="Shape 75"/>
-          <p:cNvSpPr/>
-          <p:nvPr/>
-        </p:nvSpPr>
-        <p:spPr>
-          <a:xfrm>
-            <a:off x="7062470" y="2948940"/>
-            <a:ext cx="189865" cy="137160"/>
-          </a:xfrm>
-          <a:prstGeom prst="rightArrow">
-            <a:avLst/>
-          </a:prstGeom>
-          <a:solidFill>
-            <a:srgbClr val="5B6470"/>
-          </a:solidFill>
-        </p:spPr>
-      </p:sp>
-      <p:pic>
-        <p:nvPicPr>
-          <p:cNvPr id="85" name="Image 7" descr="preencoded.png"/>
-          <p:cNvPicPr>
-            <a:picLocks noChangeAspect="1"/>
-          </p:cNvPicPr>
-          <p:nvPr/>
-        </p:nvPicPr>
-        <p:blipFill>
-          <a:blip r:embed="rId7"/>
-          <a:stretch>
-            <a:fillRect/>
-          </a:stretch>
-        </p:blipFill>
-        <p:spPr>
-          <a:xfrm>
-            <a:off x="7328916" y="2779776"/>
-            <a:ext cx="475488" cy="475488"/>
-          </a:xfrm>
-          <a:prstGeom prst="rect">
-            <a:avLst/>
-          </a:prstGeom>
-        </p:spPr>
-      </p:pic>
-      <p:sp>
-        <p:nvSpPr>
-          <p:cNvPr id="86" name="Text 76"/>
-          <p:cNvSpPr/>
-          <p:nvPr/>
-        </p:nvSpPr>
-        <p:spPr>
-          <a:xfrm>
-            <a:off x="7191756" y="3291840"/>
-            <a:ext cx="749808" cy="237744"/>
-          </a:xfrm>
-          <a:prstGeom prst="rect">
-            <a:avLst/>
-          </a:prstGeom>
-          <a:noFill/>
-        </p:spPr>
-        <p:txBody>
-          <a:bodyPr wrap="square" lIns="0" tIns="0" rIns="0" bIns="0" rtlCol="0" anchor="t">
-            <a:normAutofit/>
-          </a:bodyPr>
-          <a:lstStyle/>
-          <a:p>
-            <a:pPr marL="0" indent="0" algn="ctr">
-              <a:buNone/>
-            </a:pPr>
-            <a:r>
-              <a:rPr lang="en-US" sz="1200" b="1" dirty="0">
-                <a:solidFill>
-                  <a:schemeClr val="tx1"/>
-                </a:solidFill>
-                <a:latin typeface="微软雅黑" panose="020B0503020204020204" pitchFamily="34" charset="-122"/>
-                <a:ea typeface="微软雅黑" panose="020B0503020204020204" pitchFamily="34" charset="-122"/>
-                <a:cs typeface="微软雅黑" panose="020B0503020204020204" pitchFamily="34" charset="-120"/>
-              </a:rPr>
-              <a:t>类模板</a:t>
-            </a:r>
-            <a:endParaRPr lang="en-US" sz="1200" b="1" dirty="0">
-              <a:solidFill>
-                <a:schemeClr val="tx1"/>
-              </a:solidFill>
-              <a:latin typeface="微软雅黑" panose="020B0503020204020204" pitchFamily="34" charset="-122"/>
-              <a:ea typeface="微软雅黑" panose="020B0503020204020204" pitchFamily="34" charset="-122"/>
-              <a:cs typeface="微软雅黑" panose="020B0503020204020204" pitchFamily="34" charset="-120"/>
-            </a:endParaRPr>
-          </a:p>
-        </p:txBody>
-      </p:sp>
-      <p:sp>
-        <p:nvSpPr>
           <p:cNvPr id="87" name="Shape 77"/>
           <p:cNvSpPr/>
           <p:nvPr/>
         </p:nvSpPr>
         <p:spPr>
           <a:xfrm>
-            <a:off x="5513832" y="3877056"/>
+            <a:off x="5513832" y="4184396"/>
             <a:ext cx="2459736" cy="1645920"/>
           </a:xfrm>
           <a:prstGeom prst="roundRect">
@@ -3237,7 +2732,7 @@
         </p:nvSpPr>
         <p:spPr>
           <a:xfrm>
-            <a:off x="5550408" y="3968496"/>
+            <a:off x="5550408" y="4275836"/>
             <a:ext cx="2386584" cy="329184"/>
           </a:xfrm>
           <a:prstGeom prst="rect">
@@ -3255,7 +2750,7 @@
               <a:buNone/>
             </a:pPr>
             <a:r>
-              <a:rPr lang="en-US" sz="1600" b="1" dirty="0">
+              <a:rPr lang="zh-CN" altLang="en-US" sz="1600" b="1" dirty="0">
                 <a:solidFill>
                   <a:srgbClr val="C00000"/>
                 </a:solidFill>
@@ -3263,9 +2758,16 @@
                 <a:ea typeface="微软雅黑" panose="020B0503020204020204" pitchFamily="34" charset="-122"/>
                 <a:cs typeface="微软雅黑" panose="020B0503020204020204" pitchFamily="34" charset="-120"/>
               </a:rPr>
-              <a:t>距离比对与开集发现</a:t>
+              <a:t>类型判定</a:t>
             </a:r>
-            <a:endParaRPr lang="en-US" sz="1600" dirty="0"/>
+            <a:endParaRPr lang="zh-CN" altLang="en-US" sz="1600" b="1" dirty="0">
+              <a:solidFill>
+                <a:srgbClr val="C00000"/>
+              </a:solidFill>
+              <a:latin typeface="微软雅黑" panose="020B0503020204020204" pitchFamily="34" charset="-122"/>
+              <a:ea typeface="微软雅黑" panose="020B0503020204020204" pitchFamily="34" charset="-122"/>
+              <a:cs typeface="微软雅黑" panose="020B0503020204020204" pitchFamily="34" charset="-120"/>
+            </a:endParaRPr>
           </a:p>
         </p:txBody>
       </p:sp>
@@ -3278,14 +2780,14 @@
           <p:nvPr/>
         </p:nvPicPr>
         <p:blipFill>
-          <a:blip r:embed="rId8"/>
+          <a:blip r:embed="rId6"/>
           <a:stretch>
             <a:fillRect/>
           </a:stretch>
         </p:blipFill>
         <p:spPr>
           <a:xfrm>
-            <a:off x="5682996" y="4553712"/>
+            <a:off x="5682996" y="4861052"/>
             <a:ext cx="475488" cy="475488"/>
           </a:xfrm>
           <a:prstGeom prst="rect">
@@ -3301,7 +2803,7 @@
         </p:nvSpPr>
         <p:spPr>
           <a:xfrm>
-            <a:off x="5545836" y="5065776"/>
+            <a:off x="5545836" y="5373116"/>
             <a:ext cx="749808" cy="237744"/>
           </a:xfrm>
           <a:prstGeom prst="rect">
@@ -3340,23 +2842,74 @@
           </a:p>
         </p:txBody>
       </p:sp>
+      <p:sp>
+        <p:nvSpPr>
+          <p:cNvPr id="93" name="Text 81"/>
+          <p:cNvSpPr/>
+          <p:nvPr/>
+        </p:nvSpPr>
+        <p:spPr>
+          <a:xfrm>
+            <a:off x="6368796" y="5373116"/>
+            <a:ext cx="749808" cy="237744"/>
+          </a:xfrm>
+          <a:prstGeom prst="rect">
+            <a:avLst/>
+          </a:prstGeom>
+          <a:noFill/>
+        </p:spPr>
+        <p:txBody>
+          <a:bodyPr wrap="square" lIns="0" tIns="0" rIns="0" bIns="0" rtlCol="0" anchor="t">
+            <a:normAutofit/>
+          </a:bodyPr>
+          <a:lstStyle/>
+          <a:p>
+            <a:pPr marL="0" indent="0" algn="ctr">
+              <a:buNone/>
+            </a:pPr>
+            <a:r>
+              <a:rPr lang="zh-CN" altLang="en-US" sz="1400" b="1" dirty="0">
+                <a:solidFill>
+                  <a:schemeClr val="accent1">
+                    <a:lumMod val="75000"/>
+                  </a:schemeClr>
+                </a:solidFill>
+                <a:latin typeface="微软雅黑" panose="020B0503020204020204" pitchFamily="34" charset="-122"/>
+                <a:ea typeface="微软雅黑" panose="020B0503020204020204" pitchFamily="34" charset="-122"/>
+                <a:cs typeface="微软雅黑" panose="020B0503020204020204" pitchFamily="34" charset="-120"/>
+              </a:rPr>
+              <a:t>判定网络</a:t>
+            </a:r>
+            <a:endParaRPr lang="zh-CN" altLang="en-US" sz="1400" b="1" dirty="0">
+              <a:solidFill>
+                <a:schemeClr val="accent1">
+                  <a:lumMod val="75000"/>
+                </a:schemeClr>
+              </a:solidFill>
+              <a:latin typeface="微软雅黑" panose="020B0503020204020204" pitchFamily="34" charset="-122"/>
+              <a:ea typeface="微软雅黑" panose="020B0503020204020204" pitchFamily="34" charset="-122"/>
+              <a:cs typeface="微软雅黑" panose="020B0503020204020204" pitchFamily="34" charset="-120"/>
+            </a:endParaRPr>
+          </a:p>
+        </p:txBody>
+      </p:sp>
       <p:pic>
         <p:nvPicPr>
-          <p:cNvPr id="92" name="Image 9" descr="preencoded.png"/>
+          <p:cNvPr id="95" name="Image 10" descr="preencoded.png"/>
           <p:cNvPicPr>
             <a:picLocks noChangeAspect="1"/>
           </p:cNvPicPr>
           <p:nvPr/>
         </p:nvPicPr>
         <p:blipFill>
-          <a:blip r:embed="rId9"/>
+          <a:blip r:embed="rId7"/>
           <a:stretch>
             <a:fillRect/>
           </a:stretch>
         </p:blipFill>
         <p:spPr>
           <a:xfrm>
-            <a:off x="6505956" y="4553712"/>
+            <a:off x="7328916" y="4861052"/>
             <a:ext cx="475488" cy="475488"/>
           </a:xfrm>
           <a:prstGeom prst="rect">
@@ -3366,13 +2919,13 @@
       </p:pic>
       <p:sp>
         <p:nvSpPr>
-          <p:cNvPr id="93" name="Text 81"/>
-          <p:cNvSpPr/>
-          <p:nvPr/>
-        </p:nvSpPr>
-        <p:spPr>
-          <a:xfrm>
-            <a:off x="6368796" y="5065776"/>
+          <p:cNvPr id="96" name="Text 83"/>
+          <p:cNvSpPr/>
+          <p:nvPr/>
+        </p:nvSpPr>
+        <p:spPr>
+          <a:xfrm>
+            <a:off x="7191756" y="5373116"/>
             <a:ext cx="749808" cy="237744"/>
           </a:xfrm>
           <a:prstGeom prst="rect">
@@ -3398,7 +2951,7 @@
                 <a:ea typeface="微软雅黑" panose="020B0503020204020204" pitchFamily="34" charset="-122"/>
                 <a:cs typeface="微软雅黑" panose="020B0503020204020204" pitchFamily="34" charset="-120"/>
               </a:rPr>
-              <a:t>判定类型</a:t>
+              <a:t>开集回写</a:t>
             </a:r>
             <a:endParaRPr lang="en-US" sz="1200" b="1" dirty="0">
               <a:solidFill>
@@ -3411,77 +2964,6 @@
           </a:p>
         </p:txBody>
       </p:sp>
-      <p:pic>
-        <p:nvPicPr>
-          <p:cNvPr id="95" name="Image 10" descr="preencoded.png"/>
-          <p:cNvPicPr>
-            <a:picLocks noChangeAspect="1"/>
-          </p:cNvPicPr>
-          <p:nvPr/>
-        </p:nvPicPr>
-        <p:blipFill>
-          <a:blip r:embed="rId10"/>
-          <a:stretch>
-            <a:fillRect/>
-          </a:stretch>
-        </p:blipFill>
-        <p:spPr>
-          <a:xfrm>
-            <a:off x="7328916" y="4553712"/>
-            <a:ext cx="475488" cy="475488"/>
-          </a:xfrm>
-          <a:prstGeom prst="rect">
-            <a:avLst/>
-          </a:prstGeom>
-        </p:spPr>
-      </p:pic>
-      <p:sp>
-        <p:nvSpPr>
-          <p:cNvPr id="96" name="Text 83"/>
-          <p:cNvSpPr/>
-          <p:nvPr/>
-        </p:nvSpPr>
-        <p:spPr>
-          <a:xfrm>
-            <a:off x="7191756" y="5065776"/>
-            <a:ext cx="749808" cy="237744"/>
-          </a:xfrm>
-          <a:prstGeom prst="rect">
-            <a:avLst/>
-          </a:prstGeom>
-          <a:noFill/>
-        </p:spPr>
-        <p:txBody>
-          <a:bodyPr wrap="square" lIns="0" tIns="0" rIns="0" bIns="0" rtlCol="0" anchor="t">
-            <a:normAutofit/>
-          </a:bodyPr>
-          <a:lstStyle/>
-          <a:p>
-            <a:pPr marL="0" indent="0" algn="ctr">
-              <a:buNone/>
-            </a:pPr>
-            <a:r>
-              <a:rPr lang="en-US" sz="1200" b="1" dirty="0">
-                <a:solidFill>
-                  <a:schemeClr val="tx1"/>
-                </a:solidFill>
-                <a:latin typeface="微软雅黑" panose="020B0503020204020204" pitchFamily="34" charset="-122"/>
-                <a:ea typeface="微软雅黑" panose="020B0503020204020204" pitchFamily="34" charset="-122"/>
-                <a:cs typeface="微软雅黑" panose="020B0503020204020204" pitchFamily="34" charset="-120"/>
-              </a:rPr>
-              <a:t>回写图谱</a:t>
-            </a:r>
-            <a:endParaRPr lang="en-US" sz="1200" b="1" dirty="0">
-              <a:solidFill>
-                <a:schemeClr val="tx1"/>
-              </a:solidFill>
-              <a:latin typeface="微软雅黑" panose="020B0503020204020204" pitchFamily="34" charset="-122"/>
-              <a:ea typeface="微软雅黑" panose="020B0503020204020204" pitchFamily="34" charset="-122"/>
-              <a:cs typeface="微软雅黑" panose="020B0503020204020204" pitchFamily="34" charset="-120"/>
-            </a:endParaRPr>
-          </a:p>
-        </p:txBody>
-      </p:sp>
       <p:sp>
         <p:nvSpPr>
           <p:cNvPr id="97" name="Shape 84"/>
@@ -3490,7 +2972,7 @@
         </p:nvSpPr>
         <p:spPr>
           <a:xfrm>
-            <a:off x="8714232" y="2103120"/>
+            <a:off x="8714232" y="2410460"/>
             <a:ext cx="2459736" cy="1645920"/>
           </a:xfrm>
           <a:prstGeom prst="roundRect">
@@ -3524,7 +3006,7 @@
         </p:nvSpPr>
         <p:spPr>
           <a:xfrm>
-            <a:off x="8750808" y="2194560"/>
+            <a:off x="8750808" y="2501900"/>
             <a:ext cx="2386584" cy="329184"/>
           </a:xfrm>
           <a:prstGeom prst="rect">
@@ -3542,7 +3024,7 @@
               <a:buNone/>
             </a:pPr>
             <a:r>
-              <a:rPr lang="en-US" sz="1600" b="1" dirty="0">
+              <a:rPr lang="zh-CN" altLang="en-US" sz="1600" b="1" dirty="0">
                 <a:solidFill>
                   <a:srgbClr val="C00000"/>
                 </a:solidFill>
@@ -3550,9 +3032,27 @@
                 <a:ea typeface="微软雅黑" panose="020B0503020204020204" pitchFamily="34" charset="-122"/>
                 <a:cs typeface="微软雅黑" panose="020B0503020204020204" pitchFamily="34" charset="-120"/>
               </a:rPr>
-              <a:t>卡尔曼滤波状态估计</a:t>
+              <a:t>滤波</a:t>
             </a:r>
-            <a:endParaRPr lang="en-US" sz="1600" dirty="0"/>
+            <a:r>
+              <a:rPr lang="zh-CN" altLang="en-US" sz="1600" b="1" dirty="0">
+                <a:solidFill>
+                  <a:srgbClr val="C00000"/>
+                </a:solidFill>
+                <a:latin typeface="微软雅黑" panose="020B0503020204020204" pitchFamily="34" charset="-122"/>
+                <a:ea typeface="微软雅黑" panose="020B0503020204020204" pitchFamily="34" charset="-122"/>
+                <a:cs typeface="微软雅黑" panose="020B0503020204020204" pitchFamily="34" charset="-120"/>
+              </a:rPr>
+              <a:t>网络</a:t>
+            </a:r>
+            <a:endParaRPr lang="zh-CN" altLang="en-US" sz="1600" b="1" dirty="0">
+              <a:solidFill>
+                <a:srgbClr val="C00000"/>
+              </a:solidFill>
+              <a:latin typeface="微软雅黑" panose="020B0503020204020204" pitchFamily="34" charset="-122"/>
+              <a:ea typeface="微软雅黑" panose="020B0503020204020204" pitchFamily="34" charset="-122"/>
+              <a:cs typeface="微软雅黑" panose="020B0503020204020204" pitchFamily="34" charset="-120"/>
+            </a:endParaRPr>
           </a:p>
         </p:txBody>
       </p:sp>
@@ -3565,14 +3065,14 @@
           <p:nvPr/>
         </p:nvPicPr>
         <p:blipFill>
-          <a:blip r:embed="rId11"/>
+          <a:blip r:embed="rId8"/>
           <a:stretch>
             <a:fillRect/>
           </a:stretch>
         </p:blipFill>
         <p:spPr>
           <a:xfrm>
-            <a:off x="8883396" y="2779776"/>
+            <a:off x="8883396" y="3087116"/>
             <a:ext cx="475488" cy="475488"/>
           </a:xfrm>
           <a:prstGeom prst="rect">
@@ -3588,7 +3088,7 @@
         </p:nvSpPr>
         <p:spPr>
           <a:xfrm>
-            <a:off x="8746236" y="3291840"/>
+            <a:off x="8746236" y="3599180"/>
             <a:ext cx="749808" cy="237744"/>
           </a:xfrm>
           <a:prstGeom prst="rect">
@@ -3629,41 +3129,13 @@
       </p:sp>
       <p:sp>
         <p:nvSpPr>
-          <p:cNvPr id="102" name="Shape 88"/>
-          <p:cNvSpPr/>
-          <p:nvPr/>
-        </p:nvSpPr>
-        <p:spPr>
-          <a:xfrm>
-            <a:off x="9660636" y="2843784"/>
-            <a:ext cx="566928" cy="347472"/>
-          </a:xfrm>
-          <a:prstGeom prst="roundRect">
-            <a:avLst>
-              <a:gd name="adj" fmla="val 13158"/>
-            </a:avLst>
-          </a:prstGeom>
-          <a:solidFill>
-            <a:srgbClr val="2E54A1"/>
-          </a:solidFill>
-          <a:effectLst>
-            <a:outerShdw blurRad="38100" dist="12700" dir="5400000" algn="bl" rotWithShape="0">
-              <a:srgbClr val="000000">
-                <a:alpha val="16000"/>
-              </a:srgbClr>
-            </a:outerShdw>
-          </a:effectLst>
-        </p:spPr>
-      </p:sp>
-      <p:sp>
-        <p:nvSpPr>
           <p:cNvPr id="103" name="Text 89"/>
           <p:cNvSpPr/>
           <p:nvPr/>
         </p:nvSpPr>
         <p:spPr>
           <a:xfrm>
-            <a:off x="9660636" y="2843784"/>
+            <a:off x="9660636" y="3151124"/>
             <a:ext cx="566928" cy="347472"/>
           </a:xfrm>
           <a:prstGeom prst="rect">
@@ -3703,7 +3175,7 @@
         </p:nvSpPr>
         <p:spPr>
           <a:xfrm>
-            <a:off x="9569196" y="3291840"/>
+            <a:off x="9569196" y="3654425"/>
             <a:ext cx="749808" cy="237744"/>
           </a:xfrm>
           <a:prstGeom prst="rect">
@@ -3721,19 +3193,23 @@
               <a:buNone/>
             </a:pPr>
             <a:r>
-              <a:rPr lang="en-US" sz="1200" b="1" dirty="0">
+              <a:rPr lang="zh-CN" altLang="en-US" sz="1400" b="1" dirty="0">
                 <a:solidFill>
-                  <a:schemeClr val="tx1"/>
+                  <a:schemeClr val="accent1">
+                    <a:lumMod val="75000"/>
+                  </a:schemeClr>
                 </a:solidFill>
                 <a:latin typeface="微软雅黑" panose="020B0503020204020204" pitchFamily="34" charset="-122"/>
                 <a:ea typeface="微软雅黑" panose="020B0503020204020204" pitchFamily="34" charset="-122"/>
                 <a:cs typeface="微软雅黑" panose="020B0503020204020204" pitchFamily="34" charset="-120"/>
               </a:rPr>
-              <a:t>滤波估计</a:t>
+              <a:t>滤波网络</a:t>
             </a:r>
-            <a:endParaRPr lang="en-US" sz="1200" b="1" dirty="0">
+            <a:endParaRPr lang="zh-CN" altLang="en-US" sz="1400" b="1" dirty="0">
               <a:solidFill>
-                <a:schemeClr val="tx1"/>
+                <a:schemeClr val="accent1">
+                  <a:lumMod val="75000"/>
+                </a:schemeClr>
               </a:solidFill>
               <a:latin typeface="微软雅黑" panose="020B0503020204020204" pitchFamily="34" charset="-122"/>
               <a:ea typeface="微软雅黑" panose="020B0503020204020204" pitchFamily="34" charset="-122"/>
@@ -3750,7 +3226,7 @@
         </p:nvSpPr>
         <p:spPr>
           <a:xfrm>
-            <a:off x="10465308" y="2971800"/>
+            <a:off x="10465308" y="3279140"/>
             <a:ext cx="201168" cy="164592"/>
           </a:xfrm>
           <a:prstGeom prst="line">
@@ -3773,7 +3249,7 @@
         </p:nvSpPr>
         <p:spPr>
           <a:xfrm>
-            <a:off x="10666476" y="2971800"/>
+            <a:off x="10666476" y="3279140"/>
             <a:ext cx="182880" cy="100584"/>
           </a:xfrm>
           <a:prstGeom prst="line">
@@ -3796,7 +3272,7 @@
         </p:nvSpPr>
         <p:spPr>
           <a:xfrm>
-            <a:off x="10849356" y="2898648"/>
+            <a:off x="10849356" y="3205988"/>
             <a:ext cx="164592" cy="173736"/>
           </a:xfrm>
           <a:prstGeom prst="line">
@@ -3819,7 +3295,7 @@
         </p:nvSpPr>
         <p:spPr>
           <a:xfrm>
-            <a:off x="10433304" y="3104388"/>
+            <a:off x="10433304" y="3411728"/>
             <a:ext cx="64008" cy="64008"/>
           </a:xfrm>
           <a:prstGeom prst="ellipse">
@@ -3844,7 +3320,7 @@
         </p:nvSpPr>
         <p:spPr>
           <a:xfrm>
-            <a:off x="10634472" y="2939796"/>
+            <a:off x="10634472" y="3247136"/>
             <a:ext cx="64008" cy="64008"/>
           </a:xfrm>
           <a:prstGeom prst="ellipse">
@@ -3869,7 +3345,7 @@
         </p:nvSpPr>
         <p:spPr>
           <a:xfrm>
-            <a:off x="10817352" y="3040380"/>
+            <a:off x="10817352" y="3347720"/>
             <a:ext cx="64008" cy="64008"/>
           </a:xfrm>
           <a:prstGeom prst="ellipse">
@@ -3894,7 +3370,7 @@
         </p:nvSpPr>
         <p:spPr>
           <a:xfrm>
-            <a:off x="10981944" y="2866644"/>
+            <a:off x="10981944" y="3173984"/>
             <a:ext cx="64008" cy="64008"/>
           </a:xfrm>
           <a:prstGeom prst="ellipse">
@@ -3919,7 +3395,7 @@
         </p:nvSpPr>
         <p:spPr>
           <a:xfrm>
-            <a:off x="10995660" y="2843784"/>
+            <a:off x="10995660" y="3151124"/>
             <a:ext cx="128016" cy="109728"/>
           </a:xfrm>
           <a:prstGeom prst="rightArrow">
@@ -3938,7 +3414,7 @@
         </p:nvSpPr>
         <p:spPr>
           <a:xfrm>
-            <a:off x="10392156" y="3291840"/>
+            <a:off x="10392156" y="3599180"/>
             <a:ext cx="749808" cy="237744"/>
           </a:xfrm>
           <a:prstGeom prst="rect">
@@ -3985,7 +3461,7 @@
         </p:nvSpPr>
         <p:spPr>
           <a:xfrm>
-            <a:off x="8714232" y="3877056"/>
+            <a:off x="8714232" y="4184396"/>
             <a:ext cx="2459736" cy="1645920"/>
           </a:xfrm>
           <a:prstGeom prst="roundRect">
@@ -4019,7 +3495,7 @@
         </p:nvSpPr>
         <p:spPr>
           <a:xfrm>
-            <a:off x="8750808" y="3968496"/>
+            <a:off x="8750808" y="4275836"/>
             <a:ext cx="2386584" cy="329184"/>
           </a:xfrm>
           <a:prstGeom prst="rect">
@@ -4037,7 +3513,7 @@
               <a:buNone/>
             </a:pPr>
             <a:r>
-              <a:rPr lang="en-US" sz="1600" b="1" dirty="0">
+              <a:rPr lang="zh-CN" altLang="en-US" sz="1600" b="1" dirty="0">
                 <a:solidFill>
                   <a:srgbClr val="C00000"/>
                 </a:solidFill>
@@ -4045,9 +3521,16 @@
                 <a:ea typeface="微软雅黑" panose="020B0503020204020204" pitchFamily="34" charset="-122"/>
                 <a:cs typeface="微软雅黑" panose="020B0503020204020204" pitchFamily="34" charset="-120"/>
               </a:rPr>
-              <a:t>知识驱动轨迹预测</a:t>
+              <a:t>轨迹分析</a:t>
             </a:r>
-            <a:endParaRPr lang="en-US" sz="1600" dirty="0"/>
+            <a:endParaRPr lang="zh-CN" altLang="en-US" sz="1600" b="1" dirty="0">
+              <a:solidFill>
+                <a:srgbClr val="C00000"/>
+              </a:solidFill>
+              <a:latin typeface="微软雅黑" panose="020B0503020204020204" pitchFamily="34" charset="-122"/>
+              <a:ea typeface="微软雅黑" panose="020B0503020204020204" pitchFamily="34" charset="-122"/>
+              <a:cs typeface="微软雅黑" panose="020B0503020204020204" pitchFamily="34" charset="-120"/>
+            </a:endParaRPr>
           </a:p>
         </p:txBody>
       </p:sp>
@@ -4059,7 +3542,7 @@
         </p:nvSpPr>
         <p:spPr>
           <a:xfrm>
-            <a:off x="8837676" y="4617720"/>
+            <a:off x="8837676" y="4925060"/>
             <a:ext cx="566928" cy="347472"/>
           </a:xfrm>
           <a:prstGeom prst="roundRect">
@@ -4087,7 +3570,7 @@
         </p:nvSpPr>
         <p:spPr>
           <a:xfrm>
-            <a:off x="8837676" y="4617720"/>
+            <a:off x="8837676" y="4925060"/>
             <a:ext cx="566928" cy="347472"/>
           </a:xfrm>
           <a:prstGeom prst="rect">
@@ -4127,7 +3610,7 @@
         </p:nvSpPr>
         <p:spPr>
           <a:xfrm>
-            <a:off x="8746236" y="5065776"/>
+            <a:off x="8746236" y="5373116"/>
             <a:ext cx="749808" cy="237744"/>
           </a:xfrm>
           <a:prstGeom prst="rect">
@@ -4175,14 +3658,14 @@
           <p:nvPr/>
         </p:nvPicPr>
         <p:blipFill>
-          <a:blip r:embed="rId12"/>
+          <a:blip r:embed="rId9"/>
           <a:stretch>
             <a:fillRect/>
           </a:stretch>
         </p:blipFill>
         <p:spPr>
           <a:xfrm>
-            <a:off x="9706356" y="4553712"/>
+            <a:off x="9706356" y="4861052"/>
             <a:ext cx="475488" cy="475488"/>
           </a:xfrm>
           <a:prstGeom prst="rect">
@@ -4198,7 +3681,7 @@
         </p:nvSpPr>
         <p:spPr>
           <a:xfrm>
-            <a:off x="9569196" y="5065776"/>
+            <a:off x="9568561" y="5417566"/>
             <a:ext cx="749808" cy="237744"/>
           </a:xfrm>
           <a:prstGeom prst="rect">
@@ -4216,9 +3699,11 @@
               <a:buNone/>
             </a:pPr>
             <a:r>
-              <a:rPr lang="en-US" sz="1200" b="1" dirty="0">
+              <a:rPr lang="en-US" sz="1400" b="1" dirty="0">
                 <a:solidFill>
-                  <a:schemeClr val="tx1"/>
+                  <a:schemeClr val="accent1">
+                    <a:lumMod val="75000"/>
+                  </a:schemeClr>
                 </a:solidFill>
                 <a:latin typeface="微软雅黑" panose="020B0503020204020204" pitchFamily="34" charset="-122"/>
                 <a:ea typeface="微软雅黑" panose="020B0503020204020204" pitchFamily="34" charset="-122"/>
@@ -4226,9 +3711,11 @@
               </a:rPr>
               <a:t>航路先验</a:t>
             </a:r>
-            <a:endParaRPr lang="en-US" sz="1200" b="1" dirty="0">
+            <a:endParaRPr lang="en-US" sz="1400" b="1" dirty="0">
               <a:solidFill>
-                <a:schemeClr val="tx1"/>
+                <a:schemeClr val="accent1">
+                  <a:lumMod val="75000"/>
+                </a:schemeClr>
               </a:solidFill>
               <a:latin typeface="微软雅黑" panose="020B0503020204020204" pitchFamily="34" charset="-122"/>
               <a:ea typeface="微软雅黑" panose="020B0503020204020204" pitchFamily="34" charset="-122"/>
@@ -4239,201 +3726,13 @@
       </p:sp>
       <p:sp>
         <p:nvSpPr>
-          <p:cNvPr id="124" name="Shape 109"/>
-          <p:cNvSpPr/>
-          <p:nvPr/>
-        </p:nvSpPr>
-        <p:spPr>
-          <a:xfrm>
-            <a:off x="10465308" y="4745736"/>
-            <a:ext cx="201168" cy="164592"/>
-          </a:xfrm>
-          <a:prstGeom prst="line">
-            <a:avLst/>
-          </a:prstGeom>
-          <a:noFill/>
-          <a:ln w="25400">
-            <a:solidFill>
-              <a:srgbClr val="C00000"/>
-            </a:solidFill>
-            <a:prstDash val="dash"/>
-          </a:ln>
-        </p:spPr>
-      </p:sp>
-      <p:sp>
-        <p:nvSpPr>
-          <p:cNvPr id="125" name="Shape 110"/>
-          <p:cNvSpPr/>
-          <p:nvPr/>
-        </p:nvSpPr>
-        <p:spPr>
-          <a:xfrm>
-            <a:off x="10666476" y="4745736"/>
-            <a:ext cx="182880" cy="100584"/>
-          </a:xfrm>
-          <a:prstGeom prst="line">
-            <a:avLst/>
-          </a:prstGeom>
-          <a:noFill/>
-          <a:ln w="25400">
-            <a:solidFill>
-              <a:srgbClr val="C00000"/>
-            </a:solidFill>
-            <a:prstDash val="dash"/>
-          </a:ln>
-        </p:spPr>
-      </p:sp>
-      <p:sp>
-        <p:nvSpPr>
-          <p:cNvPr id="126" name="Shape 111"/>
-          <p:cNvSpPr/>
-          <p:nvPr/>
-        </p:nvSpPr>
-        <p:spPr>
-          <a:xfrm>
-            <a:off x="10849356" y="4672584"/>
-            <a:ext cx="164592" cy="173736"/>
-          </a:xfrm>
-          <a:prstGeom prst="line">
-            <a:avLst/>
-          </a:prstGeom>
-          <a:noFill/>
-          <a:ln w="25400">
-            <a:solidFill>
-              <a:srgbClr val="C00000"/>
-            </a:solidFill>
-            <a:prstDash val="dash"/>
-          </a:ln>
-        </p:spPr>
-      </p:sp>
-      <p:sp>
-        <p:nvSpPr>
-          <p:cNvPr id="127" name="Shape 112"/>
-          <p:cNvSpPr/>
-          <p:nvPr/>
-        </p:nvSpPr>
-        <p:spPr>
-          <a:xfrm>
-            <a:off x="10433304" y="4878324"/>
-            <a:ext cx="64008" cy="64008"/>
-          </a:xfrm>
-          <a:prstGeom prst="ellipse">
-            <a:avLst/>
-          </a:prstGeom>
-          <a:solidFill>
-            <a:srgbClr val="C00000"/>
-          </a:solidFill>
-          <a:ln w="6350">
-            <a:solidFill>
-              <a:srgbClr val="FFFFFF"/>
-            </a:solidFill>
-            <a:prstDash val="solid"/>
-          </a:ln>
-        </p:spPr>
-      </p:sp>
-      <p:sp>
-        <p:nvSpPr>
-          <p:cNvPr id="128" name="Shape 113"/>
-          <p:cNvSpPr/>
-          <p:nvPr/>
-        </p:nvSpPr>
-        <p:spPr>
-          <a:xfrm>
-            <a:off x="10634472" y="4713732"/>
-            <a:ext cx="64008" cy="64008"/>
-          </a:xfrm>
-          <a:prstGeom prst="ellipse">
-            <a:avLst/>
-          </a:prstGeom>
-          <a:solidFill>
-            <a:srgbClr val="C00000"/>
-          </a:solidFill>
-          <a:ln w="6350">
-            <a:solidFill>
-              <a:srgbClr val="FFFFFF"/>
-            </a:solidFill>
-            <a:prstDash val="solid"/>
-          </a:ln>
-        </p:spPr>
-      </p:sp>
-      <p:sp>
-        <p:nvSpPr>
-          <p:cNvPr id="129" name="Shape 114"/>
-          <p:cNvSpPr/>
-          <p:nvPr/>
-        </p:nvSpPr>
-        <p:spPr>
-          <a:xfrm>
-            <a:off x="10817352" y="4814316"/>
-            <a:ext cx="64008" cy="64008"/>
-          </a:xfrm>
-          <a:prstGeom prst="ellipse">
-            <a:avLst/>
-          </a:prstGeom>
-          <a:solidFill>
-            <a:srgbClr val="C00000"/>
-          </a:solidFill>
-          <a:ln w="6350">
-            <a:solidFill>
-              <a:srgbClr val="FFFFFF"/>
-            </a:solidFill>
-            <a:prstDash val="solid"/>
-          </a:ln>
-        </p:spPr>
-      </p:sp>
-      <p:sp>
-        <p:nvSpPr>
-          <p:cNvPr id="130" name="Shape 115"/>
-          <p:cNvSpPr/>
-          <p:nvPr/>
-        </p:nvSpPr>
-        <p:spPr>
-          <a:xfrm>
-            <a:off x="10981944" y="4640580"/>
-            <a:ext cx="64008" cy="64008"/>
-          </a:xfrm>
-          <a:prstGeom prst="ellipse">
-            <a:avLst/>
-          </a:prstGeom>
-          <a:solidFill>
-            <a:srgbClr val="C00000"/>
-          </a:solidFill>
-          <a:ln w="6350">
-            <a:solidFill>
-              <a:srgbClr val="FFFFFF"/>
-            </a:solidFill>
-            <a:prstDash val="solid"/>
-          </a:ln>
-        </p:spPr>
-      </p:sp>
-      <p:sp>
-        <p:nvSpPr>
-          <p:cNvPr id="131" name="Shape 116"/>
-          <p:cNvSpPr/>
-          <p:nvPr/>
-        </p:nvSpPr>
-        <p:spPr>
-          <a:xfrm>
-            <a:off x="10995660" y="4617720"/>
-            <a:ext cx="128016" cy="109728"/>
-          </a:xfrm>
-          <a:prstGeom prst="rightArrow">
-            <a:avLst/>
-          </a:prstGeom>
-          <a:solidFill>
-            <a:srgbClr val="C00000"/>
-          </a:solidFill>
-        </p:spPr>
-      </p:sp>
-      <p:sp>
-        <p:nvSpPr>
           <p:cNvPr id="132" name="Text 117"/>
           <p:cNvSpPr/>
           <p:nvPr/>
         </p:nvSpPr>
         <p:spPr>
           <a:xfrm>
-            <a:off x="10392156" y="5065776"/>
+            <a:off x="10392156" y="5373116"/>
             <a:ext cx="749808" cy="237744"/>
           </a:xfrm>
           <a:prstGeom prst="rect">
@@ -4480,7 +3779,7 @@
         </p:nvSpPr>
         <p:spPr>
           <a:xfrm>
-            <a:off x="4969764" y="1280160"/>
+            <a:off x="4969764" y="1587500"/>
             <a:ext cx="347472" cy="475488"/>
           </a:xfrm>
           <a:prstGeom prst="chevron">
@@ -4493,114 +3792,13 @@
       </p:sp>
       <p:sp>
         <p:nvSpPr>
-          <p:cNvPr id="134" name="Text 119"/>
-          <p:cNvSpPr/>
-          <p:nvPr/>
-        </p:nvSpPr>
-        <p:spPr>
-          <a:xfrm>
-            <a:off x="4942332" y="3017520"/>
-            <a:ext cx="402336" cy="1188720"/>
-          </a:xfrm>
-          <a:prstGeom prst="rect">
-            <a:avLst/>
-          </a:prstGeom>
-          <a:noFill/>
-        </p:spPr>
-        <p:txBody>
-          <a:bodyPr wrap="square" lIns="0" tIns="0" rIns="0" bIns="0" rtlCol="0" anchor="ctr"/>
-          <a:lstStyle/>
-          <a:p>
-            <a:pPr marL="0" indent="0" algn="ctr">
-              <a:lnSpc>
-                <a:spcPct val="90000"/>
-              </a:lnSpc>
-              <a:buNone/>
-            </a:pPr>
-            <a:r>
-              <a:rPr lang="en-US" sz="1300" b="1" dirty="0">
-                <a:solidFill>
-                  <a:srgbClr val="2E54A1"/>
-                </a:solidFill>
-                <a:latin typeface="微软雅黑" panose="020B0503020204020204" pitchFamily="34" charset="-122"/>
-                <a:ea typeface="微软雅黑" panose="020B0503020204020204" pitchFamily="34" charset="-122"/>
-                <a:cs typeface="微软雅黑" panose="020B0503020204020204" pitchFamily="34" charset="-120"/>
-              </a:rPr>
-              <a:t>存</a:t>
-            </a:r>
-            <a:endParaRPr lang="en-US" sz="1300" dirty="0"/>
-          </a:p>
-          <a:p>
-            <a:pPr marL="0" indent="0" algn="ctr">
-              <a:lnSpc>
-                <a:spcPct val="90000"/>
-              </a:lnSpc>
-              <a:buNone/>
-            </a:pPr>
-            <a:r>
-              <a:rPr lang="en-US" sz="1300" b="1" dirty="0">
-                <a:solidFill>
-                  <a:srgbClr val="2E54A1"/>
-                </a:solidFill>
-                <a:latin typeface="微软雅黑" panose="020B0503020204020204" pitchFamily="34" charset="-122"/>
-                <a:ea typeface="微软雅黑" panose="020B0503020204020204" pitchFamily="34" charset="-122"/>
-                <a:cs typeface="微软雅黑" panose="020B0503020204020204" pitchFamily="34" charset="-120"/>
-              </a:rPr>
-              <a:t>在</a:t>
-            </a:r>
-            <a:endParaRPr lang="en-US" sz="1300" dirty="0"/>
-          </a:p>
-          <a:p>
-            <a:pPr marL="0" indent="0" algn="ctr">
-              <a:lnSpc>
-                <a:spcPct val="90000"/>
-              </a:lnSpc>
-              <a:buNone/>
-            </a:pPr>
-            <a:r>
-              <a:rPr lang="en-US" sz="1300" b="1" dirty="0">
-                <a:solidFill>
-                  <a:srgbClr val="2E54A1"/>
-                </a:solidFill>
-                <a:latin typeface="微软雅黑" panose="020B0503020204020204" pitchFamily="34" charset="-122"/>
-                <a:ea typeface="微软雅黑" panose="020B0503020204020204" pitchFamily="34" charset="-122"/>
-                <a:cs typeface="微软雅黑" panose="020B0503020204020204" pitchFamily="34" charset="-120"/>
-              </a:rPr>
-              <a:t>信</a:t>
-            </a:r>
-            <a:endParaRPr lang="en-US" sz="1300" dirty="0"/>
-          </a:p>
-          <a:p>
-            <a:pPr marL="0" indent="0" algn="ctr">
-              <a:lnSpc>
-                <a:spcPct val="90000"/>
-              </a:lnSpc>
-              <a:buNone/>
-            </a:pPr>
-            <a:r>
-              <a:rPr lang="en-US" sz="1300" b="1" dirty="0">
-                <a:solidFill>
-                  <a:srgbClr val="2E54A1"/>
-                </a:solidFill>
-                <a:latin typeface="微软雅黑" panose="020B0503020204020204" pitchFamily="34" charset="-122"/>
-                <a:ea typeface="微软雅黑" panose="020B0503020204020204" pitchFamily="34" charset="-122"/>
-                <a:cs typeface="微软雅黑" panose="020B0503020204020204" pitchFamily="34" charset="-120"/>
-              </a:rPr>
-              <a:t>号</a:t>
-            </a:r>
-            <a:endParaRPr lang="en-US" sz="1300" dirty="0"/>
-          </a:p>
-        </p:txBody>
-      </p:sp>
-      <p:sp>
-        <p:nvSpPr>
           <p:cNvPr id="135" name="Shape 120"/>
           <p:cNvSpPr/>
           <p:nvPr/>
         </p:nvSpPr>
         <p:spPr>
           <a:xfrm>
-            <a:off x="8170164" y="1280160"/>
+            <a:off x="8170164" y="1587500"/>
             <a:ext cx="347472" cy="475488"/>
           </a:xfrm>
           <a:prstGeom prst="chevron">
@@ -4613,114 +3811,13 @@
       </p:sp>
       <p:sp>
         <p:nvSpPr>
-          <p:cNvPr id="136" name="Text 121"/>
-          <p:cNvSpPr/>
-          <p:nvPr/>
-        </p:nvSpPr>
-        <p:spPr>
-          <a:xfrm>
-            <a:off x="8142732" y="3017520"/>
-            <a:ext cx="402336" cy="1188720"/>
-          </a:xfrm>
-          <a:prstGeom prst="rect">
-            <a:avLst/>
-          </a:prstGeom>
-          <a:noFill/>
-        </p:spPr>
-        <p:txBody>
-          <a:bodyPr wrap="square" lIns="0" tIns="0" rIns="0" bIns="0" rtlCol="0" anchor="ctr"/>
-          <a:lstStyle/>
-          <a:p>
-            <a:pPr marL="0" indent="0" algn="ctr">
-              <a:lnSpc>
-                <a:spcPct val="90000"/>
-              </a:lnSpc>
-              <a:buNone/>
-            </a:pPr>
-            <a:r>
-              <a:rPr lang="en-US" sz="1300" b="1" dirty="0">
-                <a:solidFill>
-                  <a:srgbClr val="2E54A1"/>
-                </a:solidFill>
-                <a:latin typeface="微软雅黑" panose="020B0503020204020204" pitchFamily="34" charset="-122"/>
-                <a:ea typeface="微软雅黑" panose="020B0503020204020204" pitchFamily="34" charset="-122"/>
-                <a:cs typeface="微软雅黑" panose="020B0503020204020204" pitchFamily="34" charset="-120"/>
-              </a:rPr>
-              <a:t>目</a:t>
-            </a:r>
-            <a:endParaRPr lang="en-US" sz="1300" dirty="0"/>
-          </a:p>
-          <a:p>
-            <a:pPr marL="0" indent="0" algn="ctr">
-              <a:lnSpc>
-                <a:spcPct val="90000"/>
-              </a:lnSpc>
-              <a:buNone/>
-            </a:pPr>
-            <a:r>
-              <a:rPr lang="en-US" sz="1300" b="1" dirty="0">
-                <a:solidFill>
-                  <a:srgbClr val="2E54A1"/>
-                </a:solidFill>
-                <a:latin typeface="微软雅黑" panose="020B0503020204020204" pitchFamily="34" charset="-122"/>
-                <a:ea typeface="微软雅黑" panose="020B0503020204020204" pitchFamily="34" charset="-122"/>
-                <a:cs typeface="微软雅黑" panose="020B0503020204020204" pitchFamily="34" charset="-120"/>
-              </a:rPr>
-              <a:t>标</a:t>
-            </a:r>
-            <a:endParaRPr lang="en-US" sz="1300" dirty="0"/>
-          </a:p>
-          <a:p>
-            <a:pPr marL="0" indent="0" algn="ctr">
-              <a:lnSpc>
-                <a:spcPct val="90000"/>
-              </a:lnSpc>
-              <a:buNone/>
-            </a:pPr>
-            <a:r>
-              <a:rPr lang="en-US" sz="1300" b="1" dirty="0">
-                <a:solidFill>
-                  <a:srgbClr val="2E54A1"/>
-                </a:solidFill>
-                <a:latin typeface="微软雅黑" panose="020B0503020204020204" pitchFamily="34" charset="-122"/>
-                <a:ea typeface="微软雅黑" panose="020B0503020204020204" pitchFamily="34" charset="-122"/>
-                <a:cs typeface="微软雅黑" panose="020B0503020204020204" pitchFamily="34" charset="-120"/>
-              </a:rPr>
-              <a:t>类</a:t>
-            </a:r>
-            <a:endParaRPr lang="en-US" sz="1300" dirty="0"/>
-          </a:p>
-          <a:p>
-            <a:pPr marL="0" indent="0" algn="ctr">
-              <a:lnSpc>
-                <a:spcPct val="90000"/>
-              </a:lnSpc>
-              <a:buNone/>
-            </a:pPr>
-            <a:r>
-              <a:rPr lang="en-US" sz="1300" b="1" dirty="0">
-                <a:solidFill>
-                  <a:srgbClr val="2E54A1"/>
-                </a:solidFill>
-                <a:latin typeface="微软雅黑" panose="020B0503020204020204" pitchFamily="34" charset="-122"/>
-                <a:ea typeface="微软雅黑" panose="020B0503020204020204" pitchFamily="34" charset="-122"/>
-                <a:cs typeface="微软雅黑" panose="020B0503020204020204" pitchFamily="34" charset="-120"/>
-              </a:rPr>
-              <a:t>型</a:t>
-            </a:r>
-            <a:endParaRPr lang="en-US" sz="1300" dirty="0"/>
-          </a:p>
-        </p:txBody>
-      </p:sp>
-      <p:sp>
-        <p:nvSpPr>
           <p:cNvPr id="137" name="Shape 122"/>
           <p:cNvSpPr/>
           <p:nvPr/>
         </p:nvSpPr>
         <p:spPr>
           <a:xfrm>
-            <a:off x="3415284" y="5577840"/>
+            <a:off x="3415284" y="5870575"/>
             <a:ext cx="256032" cy="292608"/>
           </a:xfrm>
           <a:prstGeom prst="downArrow">
@@ -4739,7 +3836,7 @@
         </p:nvSpPr>
         <p:spPr>
           <a:xfrm>
-            <a:off x="6615684" y="5577840"/>
+            <a:off x="6616319" y="5870575"/>
             <a:ext cx="256032" cy="292608"/>
           </a:xfrm>
           <a:prstGeom prst="downArrow">
@@ -4758,8 +3855,8 @@
         </p:nvSpPr>
         <p:spPr>
           <a:xfrm>
-            <a:off x="2194560" y="5870448"/>
-            <a:ext cx="9098280" cy="640080"/>
+            <a:off x="2194560" y="6235700"/>
+            <a:ext cx="9098280" cy="445135"/>
           </a:xfrm>
           <a:prstGeom prst="roundRect">
             <a:avLst>
@@ -4792,8 +3889,8 @@
         </p:nvSpPr>
         <p:spPr>
           <a:xfrm>
-            <a:off x="2194560" y="5870448"/>
-            <a:ext cx="9098280" cy="640080"/>
+            <a:off x="2166620" y="6225540"/>
+            <a:ext cx="9151620" cy="455295"/>
           </a:xfrm>
           <a:prstGeom prst="rect">
             <a:avLst/>
@@ -4810,7 +3907,7 @@
               <a:buNone/>
             </a:pPr>
             <a:r>
-              <a:rPr lang="en-US" sz="2400" b="1" dirty="0">
+              <a:rPr lang="en-US" b="1" dirty="0">
                 <a:solidFill>
                   <a:srgbClr val="2E54A1"/>
                 </a:solidFill>
@@ -4820,7 +3917,7 @@
               </a:rPr>
               <a:t>支撑海域自主侦测的目标级态势认知</a:t>
             </a:r>
-            <a:endParaRPr lang="en-US" sz="2400" dirty="0"/>
+            <a:endParaRPr lang="en-US" dirty="0"/>
           </a:p>
         </p:txBody>
       </p:sp>
@@ -4832,7 +3929,7 @@
         </p:nvSpPr>
         <p:spPr>
           <a:xfrm>
-            <a:off x="4071620" y="2948940"/>
+            <a:off x="4071620" y="3256280"/>
             <a:ext cx="146304" cy="137160"/>
           </a:xfrm>
           <a:prstGeom prst="rightArrow">
@@ -4851,7 +3948,7 @@
         </p:nvSpPr>
         <p:spPr>
           <a:xfrm>
-            <a:off x="3861435" y="4723130"/>
+            <a:off x="3861435" y="5030470"/>
             <a:ext cx="189865" cy="137160"/>
           </a:xfrm>
           <a:prstGeom prst="rightArrow">
@@ -4870,7 +3967,7 @@
         </p:nvSpPr>
         <p:spPr>
           <a:xfrm>
-            <a:off x="6223000" y="4713605"/>
+            <a:off x="6223000" y="5020945"/>
             <a:ext cx="187325" cy="137160"/>
           </a:xfrm>
           <a:prstGeom prst="rightArrow">
@@ -4889,7 +3986,7 @@
         </p:nvSpPr>
         <p:spPr>
           <a:xfrm>
-            <a:off x="7062470" y="4723130"/>
+            <a:off x="7062470" y="5030470"/>
             <a:ext cx="189865" cy="137160"/>
           </a:xfrm>
           <a:prstGeom prst="rightArrow">
@@ -4908,7 +4005,7 @@
         </p:nvSpPr>
         <p:spPr>
           <a:xfrm>
-            <a:off x="9925939" y="5577840"/>
+            <a:off x="9926574" y="5870575"/>
             <a:ext cx="256032" cy="292608"/>
           </a:xfrm>
           <a:prstGeom prst="downArrow">
@@ -4927,7 +4024,7 @@
         </p:nvSpPr>
         <p:spPr>
           <a:xfrm>
-            <a:off x="9404350" y="2998470"/>
+            <a:off x="9404350" y="3305810"/>
             <a:ext cx="189865" cy="137160"/>
           </a:xfrm>
           <a:prstGeom prst="rightArrow">
@@ -4946,7 +4043,7 @@
         </p:nvSpPr>
         <p:spPr>
           <a:xfrm>
-            <a:off x="10243185" y="2971800"/>
+            <a:off x="10243185" y="3279140"/>
             <a:ext cx="189865" cy="137160"/>
           </a:xfrm>
           <a:prstGeom prst="rightArrow">
@@ -4965,7 +4062,7 @@
         </p:nvSpPr>
         <p:spPr>
           <a:xfrm>
-            <a:off x="9471025" y="4727575"/>
+            <a:off x="9471025" y="5034915"/>
             <a:ext cx="189865" cy="137160"/>
           </a:xfrm>
           <a:prstGeom prst="rightArrow">
@@ -4984,7 +4081,7 @@
         </p:nvSpPr>
         <p:spPr>
           <a:xfrm>
-            <a:off x="10202545" y="4727575"/>
+            <a:off x="10202545" y="5034915"/>
             <a:ext cx="189865" cy="137160"/>
           </a:xfrm>
           <a:prstGeom prst="rightArrow">
@@ -4995,6 +4092,681 @@
           </a:solidFill>
         </p:spPr>
       </p:sp>
+      <p:pic>
+        <p:nvPicPr>
+          <p:cNvPr id="64" name="图片 63"/>
+          <p:cNvPicPr>
+            <a:picLocks noChangeAspect="1"/>
+          </p:cNvPicPr>
+          <p:nvPr/>
+        </p:nvPicPr>
+        <p:blipFill>
+          <a:blip r:embed="rId10"/>
+          <a:stretch>
+            <a:fillRect/>
+          </a:stretch>
+        </p:blipFill>
+        <p:spPr>
+          <a:xfrm>
+            <a:off x="9890760" y="149860"/>
+            <a:ext cx="775335" cy="775335"/>
+          </a:xfrm>
+          <a:prstGeom prst="rect">
+            <a:avLst/>
+          </a:prstGeom>
+        </p:spPr>
+      </p:pic>
+      <p:grpSp>
+        <p:nvGrpSpPr>
+          <p:cNvPr id="101" name="组合 100"/>
+          <p:cNvGrpSpPr/>
+          <p:nvPr/>
+        </p:nvGrpSpPr>
+        <p:grpSpPr>
+          <a:xfrm rot="16200000">
+            <a:off x="9291638" y="3527743"/>
+            <a:ext cx="4846955" cy="855980"/>
+            <a:chOff x="6111" y="893"/>
+            <a:chExt cx="7633" cy="1348"/>
+          </a:xfrm>
+        </p:grpSpPr>
+        <p:sp>
+          <p:nvSpPr>
+            <p:cNvPr id="91" name="Shape 30"/>
+            <p:cNvSpPr/>
+            <p:nvPr/>
+          </p:nvSpPr>
+          <p:spPr>
+            <a:xfrm>
+              <a:off x="6111" y="1112"/>
+              <a:ext cx="7371" cy="855"/>
+            </a:xfrm>
+            <a:prstGeom prst="roundRect">
+              <a:avLst>
+                <a:gd name="adj" fmla="val 6250"/>
+              </a:avLst>
+            </a:prstGeom>
+            <a:gradFill>
+              <a:gsLst>
+                <a:gs pos="50000">
+                  <a:schemeClr val="tx1"/>
+                </a:gs>
+                <a:gs pos="0">
+                  <a:schemeClr val="tx1">
+                    <a:lumMod val="25000"/>
+                    <a:lumOff val="75000"/>
+                  </a:schemeClr>
+                </a:gs>
+                <a:gs pos="100000">
+                  <a:schemeClr val="tx1">
+                    <a:lumMod val="85000"/>
+                  </a:schemeClr>
+                </a:gs>
+              </a:gsLst>
+              <a:lin ang="5400000" scaled="1"/>
+            </a:gradFill>
+            <a:effectLst>
+              <a:outerShdw blurRad="38100" dist="12700" dir="5400000" algn="bl" rotWithShape="0">
+                <a:srgbClr val="000000">
+                  <a:alpha val="16000"/>
+                </a:srgbClr>
+              </a:outerShdw>
+            </a:effectLst>
+          </p:spPr>
+        </p:sp>
+        <p:sp>
+          <p:nvSpPr>
+            <p:cNvPr id="94" name="Text 31"/>
+            <p:cNvSpPr/>
+            <p:nvPr/>
+          </p:nvSpPr>
+          <p:spPr>
+            <a:xfrm rot="10800000">
+              <a:off x="6481" y="893"/>
+              <a:ext cx="7263" cy="1348"/>
+            </a:xfrm>
+            <a:prstGeom prst="rect">
+              <a:avLst/>
+            </a:prstGeom>
+            <a:noFill/>
+          </p:spPr>
+          <p:txBody>
+            <a:bodyPr wrap="square" lIns="25400" tIns="25400" rIns="25400" bIns="25400" rtlCol="0" anchor="ctr"/>
+            <a:lstStyle/>
+            <a:p>
+              <a:pPr marL="0" indent="0" algn="ctr">
+                <a:lnSpc>
+                  <a:spcPct val="95000"/>
+                </a:lnSpc>
+                <a:buNone/>
+              </a:pPr>
+              <a:r>
+                <a:rPr lang="zh-CN" altLang="en-US" b="1" dirty="0">
+                  <a:solidFill>
+                    <a:srgbClr val="FFFFFF"/>
+                  </a:solidFill>
+                  <a:latin typeface="微软雅黑" panose="020B0503020204020204" pitchFamily="34" charset="-122"/>
+                  <a:ea typeface="微软雅黑" panose="020B0503020204020204" pitchFamily="34" charset="-122"/>
+                  <a:cs typeface="微软雅黑" panose="020B0503020204020204" pitchFamily="34" charset="-120"/>
+                </a:rPr>
+                <a:t>混合专家系统</a:t>
+              </a:r>
+              <a:endParaRPr lang="zh-CN" altLang="en-US" b="1" dirty="0">
+                <a:solidFill>
+                  <a:srgbClr val="FFFFFF"/>
+                </a:solidFill>
+                <a:latin typeface="微软雅黑" panose="020B0503020204020204" pitchFamily="34" charset="-122"/>
+                <a:ea typeface="微软雅黑" panose="020B0503020204020204" pitchFamily="34" charset="-122"/>
+                <a:cs typeface="微软雅黑" panose="020B0503020204020204" pitchFamily="34" charset="-120"/>
+              </a:endParaRPr>
+            </a:p>
+          </p:txBody>
+        </p:sp>
+      </p:grpSp>
+      <p:pic>
+        <p:nvPicPr>
+          <p:cNvPr id="153" name="图片 152"/>
+          <p:cNvPicPr>
+            <a:picLocks noChangeAspect="1"/>
+          </p:cNvPicPr>
+          <p:nvPr/>
+        </p:nvPicPr>
+        <p:blipFill>
+          <a:blip r:embed="rId11"/>
+          <a:stretch>
+            <a:fillRect/>
+          </a:stretch>
+        </p:blipFill>
+        <p:spPr>
+          <a:xfrm>
+            <a:off x="2117090" y="857885"/>
+            <a:ext cx="840740" cy="840740"/>
+          </a:xfrm>
+          <a:prstGeom prst="rect">
+            <a:avLst/>
+          </a:prstGeom>
+        </p:spPr>
+      </p:pic>
+      <p:grpSp>
+        <p:nvGrpSpPr>
+          <p:cNvPr id="158" name="组合 157"/>
+          <p:cNvGrpSpPr/>
+          <p:nvPr/>
+        </p:nvGrpSpPr>
+        <p:grpSpPr>
+          <a:xfrm>
+            <a:off x="9299575" y="953135"/>
+            <a:ext cx="1824355" cy="370840"/>
+            <a:chOff x="9950" y="769"/>
+            <a:chExt cx="2873" cy="584"/>
+          </a:xfrm>
+        </p:grpSpPr>
+        <p:sp>
+          <p:nvSpPr>
+            <p:cNvPr id="156" name="Shape 33"/>
+            <p:cNvSpPr/>
+            <p:nvPr/>
+          </p:nvSpPr>
+          <p:spPr>
+            <a:xfrm>
+              <a:off x="10419" y="769"/>
+              <a:ext cx="1935" cy="584"/>
+            </a:xfrm>
+            <a:prstGeom prst="roundRect">
+              <a:avLst>
+                <a:gd name="adj" fmla="val 6250"/>
+              </a:avLst>
+            </a:prstGeom>
+            <a:gradFill>
+              <a:gsLst>
+                <a:gs pos="0">
+                  <a:srgbClr val="FF0000"/>
+                </a:gs>
+                <a:gs pos="100000">
+                  <a:schemeClr val="accent1">
+                    <a:lumMod val="75000"/>
+                  </a:schemeClr>
+                </a:gs>
+              </a:gsLst>
+              <a:lin ang="5400000" scaled="0"/>
+            </a:gradFill>
+            <a:effectLst>
+              <a:outerShdw blurRad="38100" dist="12700" dir="5400000" algn="bl" rotWithShape="0">
+                <a:srgbClr val="000000">
+                  <a:alpha val="16000"/>
+                </a:srgbClr>
+              </a:outerShdw>
+            </a:effectLst>
+          </p:spPr>
+        </p:sp>
+        <p:sp>
+          <p:nvSpPr>
+            <p:cNvPr id="157" name="文本框 156"/>
+            <p:cNvSpPr txBox="1"/>
+            <p:nvPr/>
+          </p:nvSpPr>
+          <p:spPr>
+            <a:xfrm>
+              <a:off x="9950" y="795"/>
+              <a:ext cx="2873" cy="558"/>
+            </a:xfrm>
+            <a:prstGeom prst="rect">
+              <a:avLst/>
+            </a:prstGeom>
+            <a:noFill/>
+          </p:spPr>
+          <p:txBody>
+            <a:bodyPr wrap="square" rtlCol="0" anchor="t">
+              <a:spAutoFit/>
+            </a:bodyPr>
+            <a:p>
+              <a:pPr marL="0" indent="0" algn="ctr">
+                <a:lnSpc>
+                  <a:spcPct val="95000"/>
+                </a:lnSpc>
+                <a:buNone/>
+              </a:pPr>
+              <a:r>
+                <a:rPr lang="zh-CN" altLang="en-US" b="1" dirty="0">
+                  <a:solidFill>
+                    <a:srgbClr val="FFFFFF"/>
+                  </a:solidFill>
+                  <a:latin typeface="微软雅黑" panose="020B0503020204020204" pitchFamily="34" charset="-122"/>
+                  <a:ea typeface="微软雅黑" panose="020B0503020204020204" pitchFamily="34" charset="-122"/>
+                  <a:cs typeface="微软雅黑" panose="020B0503020204020204" pitchFamily="34" charset="-120"/>
+                  <a:sym typeface="+mn-ea"/>
+                </a:rPr>
+                <a:t>专家调度员</a:t>
+              </a:r>
+              <a:endParaRPr lang="zh-CN" altLang="en-US" b="1" dirty="0">
+                <a:solidFill>
+                  <a:srgbClr val="FFFFFF"/>
+                </a:solidFill>
+                <a:latin typeface="微软雅黑" panose="020B0503020204020204" pitchFamily="34" charset="-122"/>
+                <a:ea typeface="微软雅黑" panose="020B0503020204020204" pitchFamily="34" charset="-122"/>
+                <a:cs typeface="微软雅黑" panose="020B0503020204020204" pitchFamily="34" charset="-120"/>
+                <a:sym typeface="+mn-ea"/>
+              </a:endParaRPr>
+            </a:p>
+          </p:txBody>
+        </p:sp>
+      </p:grpSp>
+      <p:sp>
+        <p:nvSpPr>
+          <p:cNvPr id="160" name="Shape 39"/>
+          <p:cNvSpPr/>
+          <p:nvPr/>
+        </p:nvSpPr>
+        <p:spPr>
+          <a:xfrm>
+            <a:off x="10881360" y="356870"/>
+            <a:ext cx="1087755" cy="1032510"/>
+          </a:xfrm>
+          <a:prstGeom prst="roundRect">
+            <a:avLst>
+              <a:gd name="adj" fmla="val 2778"/>
+            </a:avLst>
+          </a:prstGeom>
+          <a:solidFill>
+            <a:srgbClr val="FFFFFF"/>
+          </a:solidFill>
+          <a:ln w="12700">
+            <a:solidFill>
+              <a:srgbClr val="E6BAC0"/>
+            </a:solidFill>
+            <a:prstDash val="solid"/>
+          </a:ln>
+          <a:effectLst>
+            <a:outerShdw blurRad="38100" dist="12700" dir="5400000" algn="bl" rotWithShape="0">
+              <a:srgbClr val="000000">
+                <a:alpha val="16000"/>
+              </a:srgbClr>
+            </a:outerShdw>
+          </a:effectLst>
+        </p:spPr>
+        <p:txBody>
+          <a:bodyPr/>
+          <a:p>
+            <a:endParaRPr lang="zh-CN" altLang="en-US"/>
+          </a:p>
+        </p:txBody>
+      </p:sp>
+      <p:pic>
+        <p:nvPicPr>
+          <p:cNvPr id="161" name="图片 160"/>
+          <p:cNvPicPr>
+            <a:picLocks noChangeAspect="1"/>
+          </p:cNvPicPr>
+          <p:nvPr/>
+        </p:nvPicPr>
+        <p:blipFill>
+          <a:blip r:embed="rId12"/>
+          <a:stretch>
+            <a:fillRect/>
+          </a:stretch>
+        </p:blipFill>
+        <p:spPr>
+          <a:xfrm>
+            <a:off x="704215" y="1664335"/>
+            <a:ext cx="988695" cy="988695"/>
+          </a:xfrm>
+          <a:prstGeom prst="rect">
+            <a:avLst/>
+          </a:prstGeom>
+        </p:spPr>
+      </p:pic>
+      <p:pic>
+        <p:nvPicPr>
+          <p:cNvPr id="163" name="图片 162"/>
+          <p:cNvPicPr>
+            <a:picLocks noChangeAspect="1"/>
+          </p:cNvPicPr>
+          <p:nvPr/>
+        </p:nvPicPr>
+        <p:blipFill>
+          <a:blip r:embed="rId13"/>
+          <a:stretch>
+            <a:fillRect/>
+          </a:stretch>
+        </p:blipFill>
+        <p:spPr>
+          <a:xfrm>
+            <a:off x="699770" y="564515"/>
+            <a:ext cx="882015" cy="882015"/>
+          </a:xfrm>
+          <a:prstGeom prst="rect">
+            <a:avLst/>
+          </a:prstGeom>
+        </p:spPr>
+      </p:pic>
+      <p:pic>
+        <p:nvPicPr>
+          <p:cNvPr id="165" name="图片 164"/>
+          <p:cNvPicPr>
+            <a:picLocks noChangeAspect="1"/>
+          </p:cNvPicPr>
+          <p:nvPr/>
+        </p:nvPicPr>
+        <p:blipFill>
+          <a:blip r:embed="rId14"/>
+          <a:stretch>
+            <a:fillRect/>
+          </a:stretch>
+        </p:blipFill>
+        <p:spPr>
+          <a:xfrm>
+            <a:off x="729615" y="4979670"/>
+            <a:ext cx="852170" cy="852170"/>
+          </a:xfrm>
+          <a:prstGeom prst="rect">
+            <a:avLst/>
+          </a:prstGeom>
+        </p:spPr>
+      </p:pic>
+      <p:pic>
+        <p:nvPicPr>
+          <p:cNvPr id="166" name="图片 165"/>
+          <p:cNvPicPr>
+            <a:picLocks noChangeAspect="1"/>
+          </p:cNvPicPr>
+          <p:nvPr/>
+        </p:nvPicPr>
+        <p:blipFill>
+          <a:blip r:embed="rId15"/>
+          <a:stretch>
+            <a:fillRect/>
+          </a:stretch>
+        </p:blipFill>
+        <p:spPr>
+          <a:xfrm>
+            <a:off x="661035" y="3829050"/>
+            <a:ext cx="1031875" cy="1031875"/>
+          </a:xfrm>
+          <a:prstGeom prst="rect">
+            <a:avLst/>
+          </a:prstGeom>
+        </p:spPr>
+      </p:pic>
+      <p:pic>
+        <p:nvPicPr>
+          <p:cNvPr id="167" name="图片 166"/>
+          <p:cNvPicPr>
+            <a:picLocks noChangeAspect="1"/>
+          </p:cNvPicPr>
+          <p:nvPr/>
+        </p:nvPicPr>
+        <p:blipFill>
+          <a:blip r:embed="rId11"/>
+          <a:stretch>
+            <a:fillRect/>
+          </a:stretch>
+        </p:blipFill>
+        <p:spPr>
+          <a:xfrm>
+            <a:off x="5317490" y="857885"/>
+            <a:ext cx="840740" cy="840740"/>
+          </a:xfrm>
+          <a:prstGeom prst="rect">
+            <a:avLst/>
+          </a:prstGeom>
+        </p:spPr>
+      </p:pic>
+      <p:pic>
+        <p:nvPicPr>
+          <p:cNvPr id="168" name="图片 167"/>
+          <p:cNvPicPr>
+            <a:picLocks noChangeAspect="1"/>
+          </p:cNvPicPr>
+          <p:nvPr/>
+        </p:nvPicPr>
+        <p:blipFill>
+          <a:blip r:embed="rId11"/>
+          <a:stretch>
+            <a:fillRect/>
+          </a:stretch>
+        </p:blipFill>
+        <p:spPr>
+          <a:xfrm>
+            <a:off x="8595360" y="857885"/>
+            <a:ext cx="840740" cy="840740"/>
+          </a:xfrm>
+          <a:prstGeom prst="rect">
+            <a:avLst/>
+          </a:prstGeom>
+        </p:spPr>
+      </p:pic>
+      <p:pic>
+        <p:nvPicPr>
+          <p:cNvPr id="169" name="图片 168" descr="bd1a43903c927de6f9f016d4d1baa125"/>
+          <p:cNvPicPr>
+            <a:picLocks noChangeAspect="1"/>
+          </p:cNvPicPr>
+          <p:nvPr/>
+        </p:nvPicPr>
+        <p:blipFill>
+          <a:blip r:embed="rId16"/>
+          <a:stretch>
+            <a:fillRect/>
+          </a:stretch>
+        </p:blipFill>
+        <p:spPr>
+          <a:xfrm>
+            <a:off x="3039745" y="3025140"/>
+            <a:ext cx="1019175" cy="574040"/>
+          </a:xfrm>
+          <a:prstGeom prst="rect">
+            <a:avLst/>
+          </a:prstGeom>
+        </p:spPr>
+      </p:pic>
+      <p:pic>
+        <p:nvPicPr>
+          <p:cNvPr id="172" name="图片 171"/>
+          <p:cNvPicPr>
+            <a:picLocks noChangeAspect="1"/>
+          </p:cNvPicPr>
+          <p:nvPr/>
+        </p:nvPicPr>
+        <p:blipFill>
+          <a:blip r:embed="rId17"/>
+          <a:stretch>
+            <a:fillRect/>
+          </a:stretch>
+        </p:blipFill>
+        <p:spPr>
+          <a:xfrm>
+            <a:off x="3342640" y="4704080"/>
+            <a:ext cx="648970" cy="648970"/>
+          </a:xfrm>
+          <a:prstGeom prst="rect">
+            <a:avLst/>
+          </a:prstGeom>
+        </p:spPr>
+      </p:pic>
+      <p:pic>
+        <p:nvPicPr>
+          <p:cNvPr id="173" name="图片 172"/>
+          <p:cNvPicPr>
+            <a:picLocks noChangeAspect="1"/>
+          </p:cNvPicPr>
+          <p:nvPr/>
+        </p:nvPicPr>
+        <p:blipFill>
+          <a:blip r:embed="rId18"/>
+          <a:stretch>
+            <a:fillRect/>
+          </a:stretch>
+        </p:blipFill>
+        <p:spPr>
+          <a:xfrm>
+            <a:off x="6452870" y="2983865"/>
+            <a:ext cx="578485" cy="578485"/>
+          </a:xfrm>
+          <a:prstGeom prst="rect">
+            <a:avLst/>
+          </a:prstGeom>
+        </p:spPr>
+      </p:pic>
+      <p:pic>
+        <p:nvPicPr>
+          <p:cNvPr id="175" name="图片 174"/>
+          <p:cNvPicPr>
+            <a:picLocks noChangeAspect="1"/>
+          </p:cNvPicPr>
+          <p:nvPr/>
+        </p:nvPicPr>
+        <p:blipFill>
+          <a:blip r:embed="rId19"/>
+          <a:stretch>
+            <a:fillRect/>
+          </a:stretch>
+        </p:blipFill>
+        <p:spPr>
+          <a:xfrm>
+            <a:off x="6409690" y="4783455"/>
+            <a:ext cx="589915" cy="589915"/>
+          </a:xfrm>
+          <a:prstGeom prst="rect">
+            <a:avLst/>
+          </a:prstGeom>
+        </p:spPr>
+      </p:pic>
+      <p:pic>
+        <p:nvPicPr>
+          <p:cNvPr id="176" name="图片 175"/>
+          <p:cNvPicPr>
+            <a:picLocks noChangeAspect="1"/>
+          </p:cNvPicPr>
+          <p:nvPr/>
+        </p:nvPicPr>
+        <p:blipFill>
+          <a:blip r:embed="rId20"/>
+          <a:stretch>
+            <a:fillRect/>
+          </a:stretch>
+        </p:blipFill>
+        <p:spPr>
+          <a:xfrm>
+            <a:off x="9614535" y="3001645"/>
+            <a:ext cx="612775" cy="612775"/>
+          </a:xfrm>
+          <a:prstGeom prst="rect">
+            <a:avLst/>
+          </a:prstGeom>
+        </p:spPr>
+      </p:pic>
+      <p:pic>
+        <p:nvPicPr>
+          <p:cNvPr id="178" name="图片 177"/>
+          <p:cNvPicPr>
+            <a:picLocks noChangeAspect="1"/>
+          </p:cNvPicPr>
+          <p:nvPr/>
+        </p:nvPicPr>
+        <p:blipFill>
+          <a:blip r:embed="rId21"/>
+          <a:stretch>
+            <a:fillRect/>
+          </a:stretch>
+        </p:blipFill>
+        <p:spPr>
+          <a:xfrm>
+            <a:off x="10465435" y="4765675"/>
+            <a:ext cx="587375" cy="587375"/>
+          </a:xfrm>
+          <a:prstGeom prst="rect">
+            <a:avLst/>
+          </a:prstGeom>
+        </p:spPr>
+      </p:pic>
+      <p:sp>
+        <p:nvSpPr>
+          <p:cNvPr id="179" name="Text 81"/>
+          <p:cNvSpPr/>
+          <p:nvPr/>
+        </p:nvSpPr>
+        <p:spPr>
+          <a:xfrm>
+            <a:off x="11045571" y="1151636"/>
+            <a:ext cx="749808" cy="237744"/>
+          </a:xfrm>
+          <a:prstGeom prst="rect">
+            <a:avLst/>
+          </a:prstGeom>
+          <a:noFill/>
+        </p:spPr>
+        <p:txBody>
+          <a:bodyPr wrap="square" lIns="0" tIns="0" rIns="0" bIns="0" rtlCol="0" anchor="t">
+            <a:normAutofit/>
+          </a:bodyPr>
+          <a:lstStyle/>
+          <a:p>
+            <a:pPr marL="0" indent="0" algn="ctr">
+              <a:buNone/>
+            </a:pPr>
+            <a:r>
+              <a:rPr lang="zh-CN" altLang="en-US" sz="1400" b="1" dirty="0">
+                <a:solidFill>
+                  <a:schemeClr val="accent1">
+                    <a:lumMod val="75000"/>
+                  </a:schemeClr>
+                </a:solidFill>
+                <a:latin typeface="微软雅黑" panose="020B0503020204020204" pitchFamily="34" charset="-122"/>
+                <a:ea typeface="微软雅黑" panose="020B0503020204020204" pitchFamily="34" charset="-122"/>
+                <a:cs typeface="微软雅黑" panose="020B0503020204020204" pitchFamily="34" charset="-120"/>
+              </a:rPr>
+              <a:t>专家</a:t>
+            </a:r>
+            <a:r>
+              <a:rPr lang="zh-CN" altLang="en-US" sz="1400" b="1" dirty="0">
+                <a:solidFill>
+                  <a:schemeClr val="accent1">
+                    <a:lumMod val="75000"/>
+                  </a:schemeClr>
+                </a:solidFill>
+                <a:latin typeface="微软雅黑" panose="020B0503020204020204" pitchFamily="34" charset="-122"/>
+                <a:ea typeface="微软雅黑" panose="020B0503020204020204" pitchFamily="34" charset="-122"/>
+                <a:cs typeface="微软雅黑" panose="020B0503020204020204" pitchFamily="34" charset="-120"/>
+              </a:rPr>
+              <a:t>门控</a:t>
+            </a:r>
+            <a:endParaRPr lang="zh-CN" altLang="en-US" sz="1400" b="1" dirty="0">
+              <a:solidFill>
+                <a:schemeClr val="accent1">
+                  <a:lumMod val="75000"/>
+                </a:schemeClr>
+              </a:solidFill>
+              <a:latin typeface="微软雅黑" panose="020B0503020204020204" pitchFamily="34" charset="-122"/>
+              <a:ea typeface="微软雅黑" panose="020B0503020204020204" pitchFamily="34" charset="-122"/>
+              <a:cs typeface="微软雅黑" panose="020B0503020204020204" pitchFamily="34" charset="-120"/>
+            </a:endParaRPr>
+          </a:p>
+        </p:txBody>
+      </p:sp>
+      <p:pic>
+        <p:nvPicPr>
+          <p:cNvPr id="180" name="图片 179"/>
+          <p:cNvPicPr>
+            <a:picLocks noChangeAspect="1"/>
+          </p:cNvPicPr>
+          <p:nvPr/>
+        </p:nvPicPr>
+        <p:blipFill>
+          <a:blip r:embed="rId22"/>
+          <a:stretch>
+            <a:fillRect/>
+          </a:stretch>
+        </p:blipFill>
+        <p:spPr>
+          <a:xfrm>
+            <a:off x="11174095" y="356870"/>
+            <a:ext cx="708660" cy="708660"/>
+          </a:xfrm>
+          <a:prstGeom prst="rect">
+            <a:avLst/>
+          </a:prstGeom>
+        </p:spPr>
+      </p:pic>
     </p:spTree>
   </p:cSld>
   <p:clrMapOvr>

--- a/军民融合/ppt/3B.pptx
+++ b/军民融合/ppt/3B.pptx
@@ -1163,7 +1163,7 @@
         </p:nvSpPr>
         <p:spPr>
           <a:xfrm>
-            <a:off x="2194560" y="1533525"/>
+            <a:off x="2185035" y="1131570"/>
             <a:ext cx="2697480" cy="711835"/>
           </a:xfrm>
           <a:prstGeom prst="roundRect">
@@ -1191,7 +1191,7 @@
         </p:nvSpPr>
         <p:spPr>
           <a:xfrm>
-            <a:off x="2194560" y="1463040"/>
+            <a:off x="2185035" y="1061085"/>
             <a:ext cx="2697480" cy="855980"/>
           </a:xfrm>
           <a:prstGeom prst="rect">
@@ -1261,7 +1261,7 @@
         </p:nvSpPr>
         <p:spPr>
           <a:xfrm>
-            <a:off x="2194560" y="2319020"/>
+            <a:off x="2185035" y="1917065"/>
             <a:ext cx="2697480" cy="3511296"/>
           </a:xfrm>
           <a:prstGeom prst="roundRect">
@@ -1288,7 +1288,7 @@
         </p:nvSpPr>
         <p:spPr>
           <a:xfrm>
-            <a:off x="5394960" y="1533525"/>
+            <a:off x="5385435" y="1131570"/>
             <a:ext cx="2697480" cy="710565"/>
           </a:xfrm>
           <a:prstGeom prst="roundRect">
@@ -1316,7 +1316,7 @@
         </p:nvSpPr>
         <p:spPr>
           <a:xfrm>
-            <a:off x="5394960" y="1532255"/>
+            <a:off x="5385435" y="1130300"/>
             <a:ext cx="2697480" cy="711835"/>
           </a:xfrm>
           <a:prstGeom prst="rect">
@@ -1386,7 +1386,7 @@
         </p:nvSpPr>
         <p:spPr>
           <a:xfrm>
-            <a:off x="5394960" y="2319020"/>
+            <a:off x="5385435" y="1917065"/>
             <a:ext cx="2697480" cy="3511296"/>
           </a:xfrm>
           <a:prstGeom prst="roundRect">
@@ -1413,7 +1413,7 @@
         </p:nvSpPr>
         <p:spPr>
           <a:xfrm>
-            <a:off x="8595360" y="1533525"/>
+            <a:off x="8585835" y="1131570"/>
             <a:ext cx="2697480" cy="709295"/>
           </a:xfrm>
           <a:prstGeom prst="roundRect">
@@ -1441,7 +1441,7 @@
         </p:nvSpPr>
         <p:spPr>
           <a:xfrm>
-            <a:off x="8620760" y="1463294"/>
+            <a:off x="8611235" y="1061339"/>
             <a:ext cx="2697480" cy="877824"/>
           </a:xfrm>
           <a:prstGeom prst="rect">
@@ -1511,7 +1511,7 @@
         </p:nvSpPr>
         <p:spPr>
           <a:xfrm>
-            <a:off x="8595360" y="2319020"/>
+            <a:off x="8585835" y="1917065"/>
             <a:ext cx="2697480" cy="3511296"/>
           </a:xfrm>
           <a:prstGeom prst="roundRect">
@@ -1538,7 +1538,7 @@
         </p:nvSpPr>
         <p:spPr>
           <a:xfrm>
-            <a:off x="2313432" y="2410460"/>
+            <a:off x="2303907" y="2008505"/>
             <a:ext cx="2459736" cy="1645920"/>
           </a:xfrm>
           <a:prstGeom prst="roundRect">
@@ -1572,7 +1572,7 @@
         </p:nvSpPr>
         <p:spPr>
           <a:xfrm>
-            <a:off x="2350008" y="2501900"/>
+            <a:off x="2340483" y="2099945"/>
             <a:ext cx="2386584" cy="329184"/>
           </a:xfrm>
           <a:prstGeom prst="rect">
@@ -1619,7 +1619,7 @@
         </p:nvSpPr>
         <p:spPr>
           <a:xfrm>
-            <a:off x="2383536" y="3344062"/>
+            <a:off x="2374011" y="2942107"/>
             <a:ext cx="35560" cy="172822"/>
           </a:xfrm>
           <a:prstGeom prst="rect">
@@ -1638,7 +1638,7 @@
         </p:nvSpPr>
         <p:spPr>
           <a:xfrm>
-            <a:off x="2440432" y="3209646"/>
+            <a:off x="2430907" y="2807691"/>
             <a:ext cx="35560" cy="307238"/>
           </a:xfrm>
           <a:prstGeom prst="rect">
@@ -1657,7 +1657,7 @@
         </p:nvSpPr>
         <p:spPr>
           <a:xfrm>
-            <a:off x="2497328" y="3305658"/>
+            <a:off x="2487803" y="2903703"/>
             <a:ext cx="35560" cy="211226"/>
           </a:xfrm>
           <a:prstGeom prst="rect">
@@ -1676,7 +1676,7 @@
         </p:nvSpPr>
         <p:spPr>
           <a:xfrm>
-            <a:off x="2554224" y="3132836"/>
+            <a:off x="2544699" y="2730881"/>
             <a:ext cx="35560" cy="384048"/>
           </a:xfrm>
           <a:prstGeom prst="rect">
@@ -1695,7 +1695,7 @@
         </p:nvSpPr>
         <p:spPr>
           <a:xfrm>
-            <a:off x="2611120" y="3248050"/>
+            <a:off x="2601595" y="2846095"/>
             <a:ext cx="35560" cy="268834"/>
           </a:xfrm>
           <a:prstGeom prst="rect">
@@ -1714,7 +1714,7 @@
         </p:nvSpPr>
         <p:spPr>
           <a:xfrm>
-            <a:off x="2668016" y="3171241"/>
+            <a:off x="2658491" y="2769286"/>
             <a:ext cx="35560" cy="345643"/>
           </a:xfrm>
           <a:prstGeom prst="rect">
@@ -1733,7 +1733,7 @@
         </p:nvSpPr>
         <p:spPr>
           <a:xfrm>
-            <a:off x="2724912" y="3324860"/>
+            <a:off x="2715387" y="2922905"/>
             <a:ext cx="35560" cy="192024"/>
           </a:xfrm>
           <a:prstGeom prst="rect">
@@ -1752,7 +1752,7 @@
         </p:nvSpPr>
         <p:spPr>
           <a:xfrm>
-            <a:off x="2781808" y="3217327"/>
+            <a:off x="2772283" y="2815372"/>
             <a:ext cx="35560" cy="299557"/>
           </a:xfrm>
           <a:prstGeom prst="rect">
@@ -1771,7 +1771,7 @@
         </p:nvSpPr>
         <p:spPr>
           <a:xfrm>
-            <a:off x="2838704" y="3363265"/>
+            <a:off x="2829179" y="2961310"/>
             <a:ext cx="35560" cy="153619"/>
           </a:xfrm>
           <a:prstGeom prst="rect">
@@ -1790,7 +1790,7 @@
         </p:nvSpPr>
         <p:spPr>
           <a:xfrm>
-            <a:off x="2372868" y="3516884"/>
+            <a:off x="2363343" y="3114929"/>
             <a:ext cx="512064" cy="0"/>
           </a:xfrm>
           <a:prstGeom prst="line">
@@ -1813,7 +1813,7 @@
         </p:nvSpPr>
         <p:spPr>
           <a:xfrm>
-            <a:off x="2253996" y="3599180"/>
+            <a:off x="2244471" y="3197225"/>
             <a:ext cx="749808" cy="237744"/>
           </a:xfrm>
           <a:prstGeom prst="rect">
@@ -1860,7 +1860,7 @@
         </p:nvSpPr>
         <p:spPr>
           <a:xfrm>
-            <a:off x="2884805" y="3256280"/>
+            <a:off x="2875280" y="2854325"/>
             <a:ext cx="146304" cy="137160"/>
           </a:xfrm>
           <a:prstGeom prst="rightArrow">
@@ -1879,7 +1879,7 @@
         </p:nvSpPr>
         <p:spPr>
           <a:xfrm>
-            <a:off x="3212846" y="3654425"/>
+            <a:off x="3203321" y="3252470"/>
             <a:ext cx="749808" cy="237744"/>
           </a:xfrm>
           <a:prstGeom prst="rect">
@@ -1930,7 +1930,7 @@
         </p:nvSpPr>
         <p:spPr>
           <a:xfrm>
-            <a:off x="4256151" y="3260725"/>
+            <a:off x="4246626" y="2858770"/>
             <a:ext cx="137160" cy="137160"/>
           </a:xfrm>
           <a:prstGeom prst="roundRect">
@@ -1957,7 +1957,7 @@
         </p:nvSpPr>
         <p:spPr>
           <a:xfrm>
-            <a:off x="4425315" y="3260725"/>
+            <a:off x="4415790" y="2858770"/>
             <a:ext cx="137160" cy="137160"/>
           </a:xfrm>
           <a:prstGeom prst="roundRect">
@@ -1984,7 +1984,7 @@
         </p:nvSpPr>
         <p:spPr>
           <a:xfrm>
-            <a:off x="4594479" y="3260725"/>
+            <a:off x="4584954" y="2858770"/>
             <a:ext cx="137160" cy="137160"/>
           </a:xfrm>
           <a:prstGeom prst="roundRect">
@@ -2011,7 +2011,7 @@
         </p:nvSpPr>
         <p:spPr>
           <a:xfrm>
-            <a:off x="4082796" y="3599180"/>
+            <a:off x="4073271" y="3197225"/>
             <a:ext cx="749808" cy="237744"/>
           </a:xfrm>
           <a:prstGeom prst="rect">
@@ -2058,7 +2058,7 @@
         </p:nvSpPr>
         <p:spPr>
           <a:xfrm>
-            <a:off x="2313432" y="4184396"/>
+            <a:off x="2303907" y="3782441"/>
             <a:ext cx="2459736" cy="1645920"/>
           </a:xfrm>
           <a:prstGeom prst="roundRect">
@@ -2092,7 +2092,7 @@
         </p:nvSpPr>
         <p:spPr>
           <a:xfrm>
-            <a:off x="2350008" y="4275836"/>
+            <a:off x="2340483" y="3873881"/>
             <a:ext cx="2386584" cy="329184"/>
           </a:xfrm>
           <a:prstGeom prst="rect">
@@ -2147,7 +2147,7 @@
         </p:blipFill>
         <p:spPr>
           <a:xfrm>
-            <a:off x="2482596" y="4861052"/>
+            <a:off x="2473071" y="4459097"/>
             <a:ext cx="475488" cy="475488"/>
           </a:xfrm>
           <a:prstGeom prst="rect">
@@ -2163,7 +2163,7 @@
         </p:nvSpPr>
         <p:spPr>
           <a:xfrm>
-            <a:off x="2345436" y="5373116"/>
+            <a:off x="2335911" y="4971161"/>
             <a:ext cx="749808" cy="237744"/>
           </a:xfrm>
           <a:prstGeom prst="rect">
@@ -2210,7 +2210,7 @@
         </p:nvSpPr>
         <p:spPr>
           <a:xfrm>
-            <a:off x="3023235" y="5030470"/>
+            <a:off x="3013710" y="4628515"/>
             <a:ext cx="189865" cy="137160"/>
           </a:xfrm>
           <a:prstGeom prst="rightArrow">
@@ -2229,7 +2229,7 @@
         </p:nvSpPr>
         <p:spPr>
           <a:xfrm>
-            <a:off x="3111246" y="5373116"/>
+            <a:off x="3101721" y="4971161"/>
             <a:ext cx="749808" cy="237744"/>
           </a:xfrm>
           <a:prstGeom prst="rect">
@@ -2288,7 +2288,7 @@
         </p:blipFill>
         <p:spPr>
           <a:xfrm>
-            <a:off x="4128516" y="4979924"/>
+            <a:off x="4118991" y="4577969"/>
             <a:ext cx="219456" cy="219456"/>
           </a:xfrm>
           <a:prstGeom prst="rect">
@@ -2312,7 +2312,7 @@
         </p:blipFill>
         <p:spPr>
           <a:xfrm>
-            <a:off x="4393692" y="4979924"/>
+            <a:off x="4384167" y="4577969"/>
             <a:ext cx="219456" cy="219456"/>
           </a:xfrm>
           <a:prstGeom prst="rect">
@@ -2328,7 +2328,7 @@
         </p:nvSpPr>
         <p:spPr>
           <a:xfrm>
-            <a:off x="3991356" y="5373116"/>
+            <a:off x="3981831" y="4971161"/>
             <a:ext cx="749808" cy="237744"/>
           </a:xfrm>
           <a:prstGeom prst="rect">
@@ -2375,7 +2375,7 @@
         </p:nvSpPr>
         <p:spPr>
           <a:xfrm>
-            <a:off x="5513832" y="2410460"/>
+            <a:off x="5504307" y="2008505"/>
             <a:ext cx="2459736" cy="1645920"/>
           </a:xfrm>
           <a:prstGeom prst="roundRect">
@@ -2409,7 +2409,7 @@
         </p:nvSpPr>
         <p:spPr>
           <a:xfrm>
-            <a:off x="5550408" y="2501900"/>
+            <a:off x="5540883" y="2099945"/>
             <a:ext cx="2386584" cy="329184"/>
           </a:xfrm>
           <a:prstGeom prst="rect">
@@ -2475,7 +2475,7 @@
         </p:blipFill>
         <p:spPr>
           <a:xfrm>
-            <a:off x="5682996" y="3087116"/>
+            <a:off x="5673471" y="2685161"/>
             <a:ext cx="475488" cy="475488"/>
           </a:xfrm>
           <a:prstGeom prst="rect">
@@ -2491,7 +2491,7 @@
         </p:nvSpPr>
         <p:spPr>
           <a:xfrm>
-            <a:off x="5545836" y="3599180"/>
+            <a:off x="5536311" y="3197225"/>
             <a:ext cx="749808" cy="237744"/>
           </a:xfrm>
           <a:prstGeom prst="rect">
@@ -2538,7 +2538,7 @@
         </p:nvSpPr>
         <p:spPr>
           <a:xfrm>
-            <a:off x="6223000" y="3260725"/>
+            <a:off x="6213475" y="2858770"/>
             <a:ext cx="187325" cy="137160"/>
           </a:xfrm>
           <a:prstGeom prst="rightArrow">
@@ -2557,7 +2557,7 @@
         </p:nvSpPr>
         <p:spPr>
           <a:xfrm>
-            <a:off x="6409436" y="3614420"/>
+            <a:off x="6399911" y="3212465"/>
             <a:ext cx="749808" cy="237744"/>
           </a:xfrm>
           <a:prstGeom prst="rect">
@@ -2608,7 +2608,7 @@
         </p:nvSpPr>
         <p:spPr>
           <a:xfrm>
-            <a:off x="7062470" y="3256280"/>
+            <a:off x="7052945" y="2854325"/>
             <a:ext cx="189865" cy="137160"/>
           </a:xfrm>
           <a:prstGeom prst="rightArrow">
@@ -2635,7 +2635,7 @@
         </p:blipFill>
         <p:spPr>
           <a:xfrm>
-            <a:off x="7328916" y="3087116"/>
+            <a:off x="7319391" y="2685161"/>
             <a:ext cx="475488" cy="475488"/>
           </a:xfrm>
           <a:prstGeom prst="rect">
@@ -2651,7 +2651,7 @@
         </p:nvSpPr>
         <p:spPr>
           <a:xfrm>
-            <a:off x="7191756" y="3599180"/>
+            <a:off x="7182231" y="3197225"/>
             <a:ext cx="749808" cy="237744"/>
           </a:xfrm>
           <a:prstGeom prst="rect">
@@ -2698,7 +2698,7 @@
         </p:nvSpPr>
         <p:spPr>
           <a:xfrm>
-            <a:off x="5513832" y="4184396"/>
+            <a:off x="5504307" y="3782441"/>
             <a:ext cx="2459736" cy="1645920"/>
           </a:xfrm>
           <a:prstGeom prst="roundRect">
@@ -2732,7 +2732,7 @@
         </p:nvSpPr>
         <p:spPr>
           <a:xfrm>
-            <a:off x="5550408" y="4275836"/>
+            <a:off x="5540883" y="3873881"/>
             <a:ext cx="2386584" cy="329184"/>
           </a:xfrm>
           <a:prstGeom prst="rect">
@@ -2787,7 +2787,7 @@
         </p:blipFill>
         <p:spPr>
           <a:xfrm>
-            <a:off x="5682996" y="4861052"/>
+            <a:off x="5673471" y="4459097"/>
             <a:ext cx="475488" cy="475488"/>
           </a:xfrm>
           <a:prstGeom prst="rect">
@@ -2803,7 +2803,7 @@
         </p:nvSpPr>
         <p:spPr>
           <a:xfrm>
-            <a:off x="5545836" y="5373116"/>
+            <a:off x="5536311" y="4971161"/>
             <a:ext cx="749808" cy="237744"/>
           </a:xfrm>
           <a:prstGeom prst="rect">
@@ -2850,7 +2850,7 @@
         </p:nvSpPr>
         <p:spPr>
           <a:xfrm>
-            <a:off x="6368796" y="5373116"/>
+            <a:off x="6359271" y="4971161"/>
             <a:ext cx="749808" cy="237744"/>
           </a:xfrm>
           <a:prstGeom prst="rect">
@@ -2909,7 +2909,7 @@
         </p:blipFill>
         <p:spPr>
           <a:xfrm>
-            <a:off x="7328916" y="4861052"/>
+            <a:off x="7319391" y="4459097"/>
             <a:ext cx="475488" cy="475488"/>
           </a:xfrm>
           <a:prstGeom prst="rect">
@@ -2925,7 +2925,7 @@
         </p:nvSpPr>
         <p:spPr>
           <a:xfrm>
-            <a:off x="7191756" y="5373116"/>
+            <a:off x="7182231" y="4971161"/>
             <a:ext cx="749808" cy="237744"/>
           </a:xfrm>
           <a:prstGeom prst="rect">
@@ -2972,7 +2972,7 @@
         </p:nvSpPr>
         <p:spPr>
           <a:xfrm>
-            <a:off x="8714232" y="2410460"/>
+            <a:off x="8704707" y="2008505"/>
             <a:ext cx="2459736" cy="1645920"/>
           </a:xfrm>
           <a:prstGeom prst="roundRect">
@@ -3006,7 +3006,7 @@
         </p:nvSpPr>
         <p:spPr>
           <a:xfrm>
-            <a:off x="8750808" y="2501900"/>
+            <a:off x="8741283" y="2099945"/>
             <a:ext cx="2386584" cy="329184"/>
           </a:xfrm>
           <a:prstGeom prst="rect">
@@ -3072,7 +3072,7 @@
         </p:blipFill>
         <p:spPr>
           <a:xfrm>
-            <a:off x="8883396" y="3087116"/>
+            <a:off x="8873871" y="2685161"/>
             <a:ext cx="475488" cy="475488"/>
           </a:xfrm>
           <a:prstGeom prst="rect">
@@ -3088,7 +3088,7 @@
         </p:nvSpPr>
         <p:spPr>
           <a:xfrm>
-            <a:off x="8746236" y="3599180"/>
+            <a:off x="8736711" y="3197225"/>
             <a:ext cx="749808" cy="237744"/>
           </a:xfrm>
           <a:prstGeom prst="rect">
@@ -3135,7 +3135,7 @@
         </p:nvSpPr>
         <p:spPr>
           <a:xfrm>
-            <a:off x="9660636" y="3151124"/>
+            <a:off x="9651111" y="2749169"/>
             <a:ext cx="566928" cy="347472"/>
           </a:xfrm>
           <a:prstGeom prst="rect">
@@ -3175,7 +3175,7 @@
         </p:nvSpPr>
         <p:spPr>
           <a:xfrm>
-            <a:off x="9569196" y="3654425"/>
+            <a:off x="9559671" y="3252470"/>
             <a:ext cx="749808" cy="237744"/>
           </a:xfrm>
           <a:prstGeom prst="rect">
@@ -3226,7 +3226,7 @@
         </p:nvSpPr>
         <p:spPr>
           <a:xfrm>
-            <a:off x="10465308" y="3279140"/>
+            <a:off x="10455783" y="2877185"/>
             <a:ext cx="201168" cy="164592"/>
           </a:xfrm>
           <a:prstGeom prst="line">
@@ -3249,7 +3249,7 @@
         </p:nvSpPr>
         <p:spPr>
           <a:xfrm>
-            <a:off x="10666476" y="3279140"/>
+            <a:off x="10656951" y="2877185"/>
             <a:ext cx="182880" cy="100584"/>
           </a:xfrm>
           <a:prstGeom prst="line">
@@ -3272,7 +3272,7 @@
         </p:nvSpPr>
         <p:spPr>
           <a:xfrm>
-            <a:off x="10849356" y="3205988"/>
+            <a:off x="10839831" y="2804033"/>
             <a:ext cx="164592" cy="173736"/>
           </a:xfrm>
           <a:prstGeom prst="line">
@@ -3295,7 +3295,7 @@
         </p:nvSpPr>
         <p:spPr>
           <a:xfrm>
-            <a:off x="10433304" y="3411728"/>
+            <a:off x="10423779" y="3009773"/>
             <a:ext cx="64008" cy="64008"/>
           </a:xfrm>
           <a:prstGeom prst="ellipse">
@@ -3320,7 +3320,7 @@
         </p:nvSpPr>
         <p:spPr>
           <a:xfrm>
-            <a:off x="10634472" y="3247136"/>
+            <a:off x="10624947" y="2845181"/>
             <a:ext cx="64008" cy="64008"/>
           </a:xfrm>
           <a:prstGeom prst="ellipse">
@@ -3345,7 +3345,7 @@
         </p:nvSpPr>
         <p:spPr>
           <a:xfrm>
-            <a:off x="10817352" y="3347720"/>
+            <a:off x="10807827" y="2945765"/>
             <a:ext cx="64008" cy="64008"/>
           </a:xfrm>
           <a:prstGeom prst="ellipse">
@@ -3370,7 +3370,7 @@
         </p:nvSpPr>
         <p:spPr>
           <a:xfrm>
-            <a:off x="10981944" y="3173984"/>
+            <a:off x="10972419" y="2772029"/>
             <a:ext cx="64008" cy="64008"/>
           </a:xfrm>
           <a:prstGeom prst="ellipse">
@@ -3395,7 +3395,7 @@
         </p:nvSpPr>
         <p:spPr>
           <a:xfrm>
-            <a:off x="10995660" y="3151124"/>
+            <a:off x="10986135" y="2749169"/>
             <a:ext cx="128016" cy="109728"/>
           </a:xfrm>
           <a:prstGeom prst="rightArrow">
@@ -3414,7 +3414,7 @@
         </p:nvSpPr>
         <p:spPr>
           <a:xfrm>
-            <a:off x="10392156" y="3599180"/>
+            <a:off x="10382631" y="3197225"/>
             <a:ext cx="749808" cy="237744"/>
           </a:xfrm>
           <a:prstGeom prst="rect">
@@ -3461,7 +3461,7 @@
         </p:nvSpPr>
         <p:spPr>
           <a:xfrm>
-            <a:off x="8714232" y="4184396"/>
+            <a:off x="8704707" y="3782441"/>
             <a:ext cx="2459736" cy="1645920"/>
           </a:xfrm>
           <a:prstGeom prst="roundRect">
@@ -3495,7 +3495,7 @@
         </p:nvSpPr>
         <p:spPr>
           <a:xfrm>
-            <a:off x="8750808" y="4275836"/>
+            <a:off x="8741283" y="3873881"/>
             <a:ext cx="2386584" cy="329184"/>
           </a:xfrm>
           <a:prstGeom prst="rect">
@@ -3542,7 +3542,7 @@
         </p:nvSpPr>
         <p:spPr>
           <a:xfrm>
-            <a:off x="8837676" y="4925060"/>
+            <a:off x="8828151" y="4523105"/>
             <a:ext cx="566928" cy="347472"/>
           </a:xfrm>
           <a:prstGeom prst="roundRect">
@@ -3570,7 +3570,7 @@
         </p:nvSpPr>
         <p:spPr>
           <a:xfrm>
-            <a:off x="8837676" y="4925060"/>
+            <a:off x="8828151" y="4523105"/>
             <a:ext cx="566928" cy="347472"/>
           </a:xfrm>
           <a:prstGeom prst="rect">
@@ -3610,7 +3610,7 @@
         </p:nvSpPr>
         <p:spPr>
           <a:xfrm>
-            <a:off x="8746236" y="5373116"/>
+            <a:off x="8736711" y="4971161"/>
             <a:ext cx="749808" cy="237744"/>
           </a:xfrm>
           <a:prstGeom prst="rect">
@@ -3665,7 +3665,7 @@
         </p:blipFill>
         <p:spPr>
           <a:xfrm>
-            <a:off x="9706356" y="4861052"/>
+            <a:off x="9696831" y="4459097"/>
             <a:ext cx="475488" cy="475488"/>
           </a:xfrm>
           <a:prstGeom prst="rect">
@@ -3681,7 +3681,7 @@
         </p:nvSpPr>
         <p:spPr>
           <a:xfrm>
-            <a:off x="9568561" y="5417566"/>
+            <a:off x="9559036" y="5015611"/>
             <a:ext cx="749808" cy="237744"/>
           </a:xfrm>
           <a:prstGeom prst="rect">
@@ -3732,7 +3732,7 @@
         </p:nvSpPr>
         <p:spPr>
           <a:xfrm>
-            <a:off x="10392156" y="5373116"/>
+            <a:off x="10382631" y="4971161"/>
             <a:ext cx="749808" cy="237744"/>
           </a:xfrm>
           <a:prstGeom prst="rect">
@@ -3779,7 +3779,7 @@
         </p:nvSpPr>
         <p:spPr>
           <a:xfrm>
-            <a:off x="4969764" y="1587500"/>
+            <a:off x="4960239" y="1185545"/>
             <a:ext cx="347472" cy="475488"/>
           </a:xfrm>
           <a:prstGeom prst="chevron">
@@ -3798,7 +3798,7 @@
         </p:nvSpPr>
         <p:spPr>
           <a:xfrm>
-            <a:off x="8170164" y="1587500"/>
+            <a:off x="8160639" y="1185545"/>
             <a:ext cx="347472" cy="475488"/>
           </a:xfrm>
           <a:prstGeom prst="chevron">
@@ -3817,8 +3817,8 @@
         </p:nvSpPr>
         <p:spPr>
           <a:xfrm>
-            <a:off x="3415284" y="5870575"/>
-            <a:ext cx="256032" cy="292608"/>
+            <a:off x="3405505" y="5468620"/>
+            <a:ext cx="255905" cy="146685"/>
           </a:xfrm>
           <a:prstGeom prst="downArrow">
             <a:avLst/>
@@ -3830,33 +3830,14 @@
       </p:sp>
       <p:sp>
         <p:nvSpPr>
-          <p:cNvPr id="138" name="Shape 123"/>
-          <p:cNvSpPr/>
-          <p:nvPr/>
-        </p:nvSpPr>
-        <p:spPr>
-          <a:xfrm>
-            <a:off x="6616319" y="5870575"/>
-            <a:ext cx="256032" cy="292608"/>
-          </a:xfrm>
-          <a:prstGeom prst="downArrow">
-            <a:avLst/>
-          </a:prstGeom>
-          <a:solidFill>
-            <a:srgbClr val="4874CB"/>
-          </a:solidFill>
-        </p:spPr>
-      </p:sp>
-      <p:sp>
-        <p:nvSpPr>
           <p:cNvPr id="140" name="Shape 125"/>
           <p:cNvSpPr/>
           <p:nvPr/>
         </p:nvSpPr>
         <p:spPr>
           <a:xfrm>
-            <a:off x="2194560" y="6235700"/>
-            <a:ext cx="9098280" cy="445135"/>
+            <a:off x="2244725" y="6552565"/>
+            <a:ext cx="9098280" cy="305435"/>
           </a:xfrm>
           <a:prstGeom prst="roundRect">
             <a:avLst>
@@ -3889,8 +3870,8 @@
         </p:nvSpPr>
         <p:spPr>
           <a:xfrm>
-            <a:off x="2166620" y="6225540"/>
-            <a:ext cx="9151620" cy="455295"/>
+            <a:off x="2012950" y="6552565"/>
+            <a:ext cx="9151620" cy="353695"/>
           </a:xfrm>
           <a:prstGeom prst="rect">
             <a:avLst/>
@@ -3907,7 +3888,7 @@
               <a:buNone/>
             </a:pPr>
             <a:r>
-              <a:rPr lang="en-US" b="1" dirty="0">
+              <a:rPr lang="en-US" sz="1600" b="1" dirty="0">
                 <a:solidFill>
                   <a:srgbClr val="2E54A1"/>
                 </a:solidFill>
@@ -3917,7 +3898,7 @@
               </a:rPr>
               <a:t>支撑海域自主侦测的目标级态势认知</a:t>
             </a:r>
-            <a:endParaRPr lang="en-US" dirty="0"/>
+            <a:endParaRPr lang="en-US" sz="1600" dirty="0"/>
           </a:p>
         </p:txBody>
       </p:sp>
@@ -3929,7 +3910,7 @@
         </p:nvSpPr>
         <p:spPr>
           <a:xfrm>
-            <a:off x="4071620" y="3256280"/>
+            <a:off x="4062095" y="2854325"/>
             <a:ext cx="146304" cy="137160"/>
           </a:xfrm>
           <a:prstGeom prst="rightArrow">
@@ -3948,7 +3929,7 @@
         </p:nvSpPr>
         <p:spPr>
           <a:xfrm>
-            <a:off x="3861435" y="5030470"/>
+            <a:off x="3851910" y="4628515"/>
             <a:ext cx="189865" cy="137160"/>
           </a:xfrm>
           <a:prstGeom prst="rightArrow">
@@ -3967,7 +3948,7 @@
         </p:nvSpPr>
         <p:spPr>
           <a:xfrm>
-            <a:off x="6223000" y="5020945"/>
+            <a:off x="6213475" y="4618990"/>
             <a:ext cx="187325" cy="137160"/>
           </a:xfrm>
           <a:prstGeom prst="rightArrow">
@@ -3986,7 +3967,7 @@
         </p:nvSpPr>
         <p:spPr>
           <a:xfrm>
-            <a:off x="7062470" y="5030470"/>
+            <a:off x="7052945" y="4628515"/>
             <a:ext cx="189865" cy="137160"/>
           </a:xfrm>
           <a:prstGeom prst="rightArrow">
@@ -3999,32 +3980,13 @@
       </p:sp>
       <p:sp>
         <p:nvSpPr>
-          <p:cNvPr id="146" name="Shape 123"/>
-          <p:cNvSpPr/>
-          <p:nvPr/>
-        </p:nvSpPr>
-        <p:spPr>
-          <a:xfrm>
-            <a:off x="9926574" y="5870575"/>
-            <a:ext cx="256032" cy="292608"/>
-          </a:xfrm>
-          <a:prstGeom prst="downArrow">
-            <a:avLst/>
-          </a:prstGeom>
-          <a:solidFill>
-            <a:srgbClr val="4874CB"/>
-          </a:solidFill>
-        </p:spPr>
-      </p:sp>
-      <p:sp>
-        <p:nvSpPr>
           <p:cNvPr id="147" name="Shape 75"/>
           <p:cNvSpPr/>
           <p:nvPr/>
         </p:nvSpPr>
         <p:spPr>
           <a:xfrm>
-            <a:off x="9404350" y="3305810"/>
+            <a:off x="9394825" y="2903855"/>
             <a:ext cx="189865" cy="137160"/>
           </a:xfrm>
           <a:prstGeom prst="rightArrow">
@@ -4043,7 +4005,7 @@
         </p:nvSpPr>
         <p:spPr>
           <a:xfrm>
-            <a:off x="10243185" y="3279140"/>
+            <a:off x="10233660" y="2877185"/>
             <a:ext cx="189865" cy="137160"/>
           </a:xfrm>
           <a:prstGeom prst="rightArrow">
@@ -4062,7 +4024,7 @@
         </p:nvSpPr>
         <p:spPr>
           <a:xfrm>
-            <a:off x="9471025" y="5034915"/>
+            <a:off x="9461500" y="4632960"/>
             <a:ext cx="189865" cy="137160"/>
           </a:xfrm>
           <a:prstGeom prst="rightArrow">
@@ -4081,7 +4043,7 @@
         </p:nvSpPr>
         <p:spPr>
           <a:xfrm>
-            <a:off x="10202545" y="5034915"/>
+            <a:off x="10193020" y="4632960"/>
             <a:ext cx="189865" cy="137160"/>
           </a:xfrm>
           <a:prstGeom prst="rightArrow">
@@ -4108,8 +4070,8 @@
         </p:blipFill>
         <p:spPr>
           <a:xfrm>
-            <a:off x="9890760" y="149860"/>
-            <a:ext cx="775335" cy="775335"/>
+            <a:off x="5203825" y="5774055"/>
+            <a:ext cx="575310" cy="575310"/>
           </a:xfrm>
           <a:prstGeom prst="rect">
             <a:avLst/>
@@ -4124,7 +4086,7 @@
         </p:nvGrpSpPr>
         <p:grpSpPr>
           <a:xfrm rot="16200000">
-            <a:off x="9291638" y="3527743"/>
+            <a:off x="9292273" y="2909888"/>
             <a:ext cx="4846955" cy="855980"/>
             <a:chOff x="6111" y="893"/>
             <a:chExt cx="7633" cy="1348"/>
@@ -4239,7 +4201,7 @@
         </p:blipFill>
         <p:spPr>
           <a:xfrm>
-            <a:off x="2117090" y="857885"/>
+            <a:off x="2107565" y="455930"/>
             <a:ext cx="840740" cy="840740"/>
           </a:xfrm>
           <a:prstGeom prst="rect">
@@ -4255,7 +4217,7 @@
         </p:nvGrpSpPr>
         <p:grpSpPr>
           <a:xfrm>
-            <a:off x="9299575" y="953135"/>
+            <a:off x="3580765" y="5896610"/>
             <a:ext cx="1824355" cy="370840"/>
             <a:chOff x="9950" y="769"/>
             <a:chExt cx="2873" cy="584"/>
@@ -4359,8 +4321,8 @@
         </p:nvSpPr>
         <p:spPr>
           <a:xfrm>
-            <a:off x="10881360" y="356870"/>
-            <a:ext cx="1087755" cy="1032510"/>
+            <a:off x="6024245" y="5636260"/>
+            <a:ext cx="763270" cy="733425"/>
           </a:xfrm>
           <a:prstGeom prst="roundRect">
             <a:avLst>
@@ -4503,7 +4465,7 @@
         </p:blipFill>
         <p:spPr>
           <a:xfrm>
-            <a:off x="5317490" y="857885"/>
+            <a:off x="5307965" y="455930"/>
             <a:ext cx="840740" cy="840740"/>
           </a:xfrm>
           <a:prstGeom prst="rect">
@@ -4527,7 +4489,7 @@
         </p:blipFill>
         <p:spPr>
           <a:xfrm>
-            <a:off x="8595360" y="857885"/>
+            <a:off x="8585835" y="455930"/>
             <a:ext cx="840740" cy="840740"/>
           </a:xfrm>
           <a:prstGeom prst="rect">
@@ -4551,7 +4513,7 @@
         </p:blipFill>
         <p:spPr>
           <a:xfrm>
-            <a:off x="3039745" y="3025140"/>
+            <a:off x="3030220" y="2623185"/>
             <a:ext cx="1019175" cy="574040"/>
           </a:xfrm>
           <a:prstGeom prst="rect">
@@ -4575,7 +4537,7 @@
         </p:blipFill>
         <p:spPr>
           <a:xfrm>
-            <a:off x="3342640" y="4704080"/>
+            <a:off x="3333115" y="4302125"/>
             <a:ext cx="648970" cy="648970"/>
           </a:xfrm>
           <a:prstGeom prst="rect">
@@ -4599,7 +4561,7 @@
         </p:blipFill>
         <p:spPr>
           <a:xfrm>
-            <a:off x="6452870" y="2983865"/>
+            <a:off x="6443345" y="2581910"/>
             <a:ext cx="578485" cy="578485"/>
           </a:xfrm>
           <a:prstGeom prst="rect">
@@ -4623,7 +4585,7 @@
         </p:blipFill>
         <p:spPr>
           <a:xfrm>
-            <a:off x="6409690" y="4783455"/>
+            <a:off x="6400165" y="4381500"/>
             <a:ext cx="589915" cy="589915"/>
           </a:xfrm>
           <a:prstGeom prst="rect">
@@ -4647,7 +4609,7 @@
         </p:blipFill>
         <p:spPr>
           <a:xfrm>
-            <a:off x="9614535" y="3001645"/>
+            <a:off x="9605010" y="2599690"/>
             <a:ext cx="612775" cy="612775"/>
           </a:xfrm>
           <a:prstGeom prst="rect">
@@ -4671,7 +4633,7 @@
         </p:blipFill>
         <p:spPr>
           <a:xfrm>
-            <a:off x="10465435" y="4765675"/>
+            <a:off x="10455910" y="4363720"/>
             <a:ext cx="587375" cy="587375"/>
           </a:xfrm>
           <a:prstGeom prst="rect">
@@ -4687,7 +4649,7 @@
         </p:nvSpPr>
         <p:spPr>
           <a:xfrm>
-            <a:off x="11045571" y="1151636"/>
+            <a:off x="6023991" y="6129401"/>
             <a:ext cx="749808" cy="237744"/>
           </a:xfrm>
           <a:prstGeom prst="rect">
@@ -4759,14 +4721,569 @@
         </p:blipFill>
         <p:spPr>
           <a:xfrm>
-            <a:off x="11174095" y="356870"/>
-            <a:ext cx="708660" cy="708660"/>
+            <a:off x="6228715" y="5636260"/>
+            <a:ext cx="457835" cy="457835"/>
           </a:xfrm>
           <a:prstGeom prst="rect">
             <a:avLst/>
           </a:prstGeom>
         </p:spPr>
       </p:pic>
+      <p:sp>
+        <p:nvSpPr>
+          <p:cNvPr id="10" name="Shape 122"/>
+          <p:cNvSpPr/>
+          <p:nvPr/>
+        </p:nvSpPr>
+        <p:spPr>
+          <a:xfrm>
+            <a:off x="6604635" y="5468620"/>
+            <a:ext cx="255905" cy="146685"/>
+          </a:xfrm>
+          <a:prstGeom prst="downArrow">
+            <a:avLst/>
+          </a:prstGeom>
+          <a:solidFill>
+            <a:srgbClr val="4874CB"/>
+          </a:solidFill>
+        </p:spPr>
+      </p:sp>
+      <p:sp>
+        <p:nvSpPr>
+          <p:cNvPr id="11" name="Shape 122"/>
+          <p:cNvSpPr/>
+          <p:nvPr/>
+        </p:nvSpPr>
+        <p:spPr>
+          <a:xfrm>
+            <a:off x="9866630" y="5468620"/>
+            <a:ext cx="255905" cy="146685"/>
+          </a:xfrm>
+          <a:prstGeom prst="downArrow">
+            <a:avLst/>
+          </a:prstGeom>
+          <a:solidFill>
+            <a:srgbClr val="4874CB"/>
+          </a:solidFill>
+        </p:spPr>
+      </p:sp>
+      <p:pic>
+        <p:nvPicPr>
+          <p:cNvPr id="15" name="图片 14"/>
+          <p:cNvPicPr>
+            <a:picLocks noChangeAspect="1"/>
+          </p:cNvPicPr>
+          <p:nvPr/>
+        </p:nvPicPr>
+        <p:blipFill>
+          <a:blip r:embed="rId11"/>
+          <a:stretch>
+            <a:fillRect/>
+          </a:stretch>
+        </p:blipFill>
+        <p:spPr>
+          <a:xfrm>
+            <a:off x="6892290" y="6214745"/>
+            <a:ext cx="292100" cy="292100"/>
+          </a:xfrm>
+          <a:prstGeom prst="rect">
+            <a:avLst/>
+          </a:prstGeom>
+        </p:spPr>
+      </p:pic>
+      <p:pic>
+        <p:nvPicPr>
+          <p:cNvPr id="16" name="图片 15"/>
+          <p:cNvPicPr>
+            <a:picLocks noChangeAspect="1"/>
+          </p:cNvPicPr>
+          <p:nvPr/>
+        </p:nvPicPr>
+        <p:blipFill>
+          <a:blip r:embed="rId11"/>
+          <a:stretch>
+            <a:fillRect/>
+          </a:stretch>
+        </p:blipFill>
+        <p:spPr>
+          <a:xfrm>
+            <a:off x="6890385" y="5831840"/>
+            <a:ext cx="292100" cy="292100"/>
+          </a:xfrm>
+          <a:prstGeom prst="rect">
+            <a:avLst/>
+          </a:prstGeom>
+        </p:spPr>
+      </p:pic>
+      <p:pic>
+        <p:nvPicPr>
+          <p:cNvPr id="17" name="图片 16"/>
+          <p:cNvPicPr>
+            <a:picLocks noChangeAspect="1"/>
+          </p:cNvPicPr>
+          <p:nvPr/>
+        </p:nvPicPr>
+        <p:blipFill>
+          <a:blip r:embed="rId11"/>
+          <a:stretch>
+            <a:fillRect/>
+          </a:stretch>
+        </p:blipFill>
+        <p:spPr>
+          <a:xfrm>
+            <a:off x="6890385" y="5500370"/>
+            <a:ext cx="292100" cy="292100"/>
+          </a:xfrm>
+          <a:prstGeom prst="rect">
+            <a:avLst/>
+          </a:prstGeom>
+        </p:spPr>
+      </p:pic>
+      <p:sp>
+        <p:nvSpPr>
+          <p:cNvPr id="18" name="Text 51"/>
+          <p:cNvSpPr/>
+          <p:nvPr/>
+        </p:nvSpPr>
+        <p:spPr>
+          <a:xfrm>
+            <a:off x="7184136" y="5554980"/>
+            <a:ext cx="749808" cy="237744"/>
+          </a:xfrm>
+          <a:prstGeom prst="rect">
+            <a:avLst/>
+          </a:prstGeom>
+          <a:noFill/>
+        </p:spPr>
+        <p:txBody>
+          <a:bodyPr wrap="square" lIns="0" tIns="0" rIns="0" bIns="0" rtlCol="0" anchor="t">
+            <a:noAutofit/>
+          </a:bodyPr>
+          <a:lstStyle/>
+          <a:p>
+            <a:pPr marL="0" indent="0" algn="ctr">
+              <a:buNone/>
+            </a:pPr>
+            <a:r>
+              <a:rPr lang="zh-CN" altLang="en-US" sz="1200" b="1" dirty="0">
+                <a:solidFill>
+                  <a:schemeClr val="tx1"/>
+                </a:solidFill>
+                <a:latin typeface="微软雅黑" panose="020B0503020204020204" pitchFamily="34" charset="-122"/>
+                <a:ea typeface="微软雅黑" panose="020B0503020204020204" pitchFamily="34" charset="-122"/>
+                <a:cs typeface="微软雅黑" panose="020B0503020204020204" pitchFamily="34" charset="-120"/>
+              </a:rPr>
+              <a:t>检测</a:t>
+            </a:r>
+            <a:r>
+              <a:rPr lang="zh-CN" altLang="en-US" sz="1200" b="1" dirty="0">
+                <a:solidFill>
+                  <a:schemeClr val="tx1"/>
+                </a:solidFill>
+                <a:latin typeface="微软雅黑" panose="020B0503020204020204" pitchFamily="34" charset="-122"/>
+                <a:ea typeface="微软雅黑" panose="020B0503020204020204" pitchFamily="34" charset="-122"/>
+                <a:cs typeface="微软雅黑" panose="020B0503020204020204" pitchFamily="34" charset="-120"/>
+              </a:rPr>
+              <a:t>专家</a:t>
+            </a:r>
+            <a:endParaRPr lang="zh-CN" altLang="en-US" sz="1200" b="1" dirty="0">
+              <a:solidFill>
+                <a:schemeClr val="tx1"/>
+              </a:solidFill>
+              <a:latin typeface="微软雅黑" panose="020B0503020204020204" pitchFamily="34" charset="-122"/>
+              <a:ea typeface="微软雅黑" panose="020B0503020204020204" pitchFamily="34" charset="-122"/>
+              <a:cs typeface="微软雅黑" panose="020B0503020204020204" pitchFamily="34" charset="-120"/>
+            </a:endParaRPr>
+          </a:p>
+        </p:txBody>
+      </p:sp>
+      <p:sp>
+        <p:nvSpPr>
+          <p:cNvPr id="19" name="Text 51"/>
+          <p:cNvSpPr/>
+          <p:nvPr/>
+        </p:nvSpPr>
+        <p:spPr>
+          <a:xfrm>
+            <a:off x="7177151" y="5896610"/>
+            <a:ext cx="749808" cy="237744"/>
+          </a:xfrm>
+          <a:prstGeom prst="rect">
+            <a:avLst/>
+          </a:prstGeom>
+          <a:noFill/>
+        </p:spPr>
+        <p:txBody>
+          <a:bodyPr wrap="square" lIns="0" tIns="0" rIns="0" bIns="0" rtlCol="0" anchor="t">
+            <a:noAutofit/>
+          </a:bodyPr>
+          <a:lstStyle/>
+          <a:p>
+            <a:pPr marL="0" indent="0" algn="ctr">
+              <a:buNone/>
+            </a:pPr>
+            <a:r>
+              <a:rPr lang="zh-CN" altLang="en-US" sz="1200" b="1" dirty="0">
+                <a:solidFill>
+                  <a:schemeClr val="tx1"/>
+                </a:solidFill>
+                <a:latin typeface="微软雅黑" panose="020B0503020204020204" pitchFamily="34" charset="-122"/>
+                <a:ea typeface="微软雅黑" panose="020B0503020204020204" pitchFamily="34" charset="-122"/>
+                <a:cs typeface="微软雅黑" panose="020B0503020204020204" pitchFamily="34" charset="-120"/>
+              </a:rPr>
+              <a:t>识别专家</a:t>
+            </a:r>
+            <a:endParaRPr lang="zh-CN" altLang="en-US" sz="1200" b="1" dirty="0">
+              <a:solidFill>
+                <a:schemeClr val="tx1"/>
+              </a:solidFill>
+              <a:latin typeface="微软雅黑" panose="020B0503020204020204" pitchFamily="34" charset="-122"/>
+              <a:ea typeface="微软雅黑" panose="020B0503020204020204" pitchFamily="34" charset="-122"/>
+              <a:cs typeface="微软雅黑" panose="020B0503020204020204" pitchFamily="34" charset="-120"/>
+            </a:endParaRPr>
+          </a:p>
+        </p:txBody>
+      </p:sp>
+      <p:sp>
+        <p:nvSpPr>
+          <p:cNvPr id="20" name="Text 51"/>
+          <p:cNvSpPr/>
+          <p:nvPr/>
+        </p:nvSpPr>
+        <p:spPr>
+          <a:xfrm>
+            <a:off x="7181596" y="6267450"/>
+            <a:ext cx="749808" cy="237744"/>
+          </a:xfrm>
+          <a:prstGeom prst="rect">
+            <a:avLst/>
+          </a:prstGeom>
+          <a:noFill/>
+        </p:spPr>
+        <p:txBody>
+          <a:bodyPr wrap="square" lIns="0" tIns="0" rIns="0" bIns="0" rtlCol="0" anchor="t">
+            <a:noAutofit/>
+          </a:bodyPr>
+          <a:lstStyle/>
+          <a:p>
+            <a:pPr marL="0" indent="0" algn="ctr">
+              <a:buNone/>
+            </a:pPr>
+            <a:r>
+              <a:rPr lang="zh-CN" altLang="en-US" sz="1200" b="1" dirty="0">
+                <a:solidFill>
+                  <a:schemeClr val="tx1"/>
+                </a:solidFill>
+                <a:latin typeface="微软雅黑" panose="020B0503020204020204" pitchFamily="34" charset="-122"/>
+                <a:ea typeface="微软雅黑" panose="020B0503020204020204" pitchFamily="34" charset="-122"/>
+                <a:cs typeface="微软雅黑" panose="020B0503020204020204" pitchFamily="34" charset="-120"/>
+              </a:rPr>
+              <a:t>分析专家</a:t>
+            </a:r>
+            <a:endParaRPr lang="zh-CN" altLang="en-US" sz="1200" b="1" dirty="0">
+              <a:solidFill>
+                <a:schemeClr val="tx1"/>
+              </a:solidFill>
+              <a:latin typeface="微软雅黑" panose="020B0503020204020204" pitchFamily="34" charset="-122"/>
+              <a:ea typeface="微软雅黑" panose="020B0503020204020204" pitchFamily="34" charset="-122"/>
+              <a:cs typeface="微软雅黑" panose="020B0503020204020204" pitchFamily="34" charset="-120"/>
+            </a:endParaRPr>
+          </a:p>
+        </p:txBody>
+      </p:sp>
+      <p:sp>
+        <p:nvSpPr>
+          <p:cNvPr id="21" name="圆角矩形 20"/>
+          <p:cNvSpPr/>
+          <p:nvPr/>
+        </p:nvSpPr>
+        <p:spPr>
+          <a:xfrm>
+            <a:off x="7927340" y="5573395"/>
+            <a:ext cx="587375" cy="146050"/>
+          </a:xfrm>
+          <a:prstGeom prst="roundRect">
+            <a:avLst/>
+          </a:prstGeom>
+          <a:gradFill>
+            <a:gsLst>
+              <a:gs pos="0">
+                <a:schemeClr val="accent1">
+                  <a:lumMod val="5000"/>
+                  <a:lumOff val="95000"/>
+                </a:schemeClr>
+              </a:gs>
+              <a:gs pos="48000">
+                <a:schemeClr val="accent1">
+                  <a:lumMod val="45000"/>
+                  <a:lumOff val="55000"/>
+                </a:schemeClr>
+              </a:gs>
+              <a:gs pos="83000">
+                <a:schemeClr val="accent1">
+                  <a:lumMod val="45000"/>
+                  <a:lumOff val="55000"/>
+                </a:schemeClr>
+              </a:gs>
+              <a:gs pos="100000">
+                <a:schemeClr val="accent1">
+                  <a:lumMod val="30000"/>
+                  <a:lumOff val="70000"/>
+                </a:schemeClr>
+              </a:gs>
+            </a:gsLst>
+            <a:lin ang="5400000" scaled="0"/>
+          </a:gradFill>
+          <a:ln>
+            <a:noFill/>
+          </a:ln>
+        </p:spPr>
+        <p:style>
+          <a:lnRef idx="2">
+            <a:schemeClr val="accent1">
+              <a:lumMod val="75000"/>
+            </a:schemeClr>
+          </a:lnRef>
+          <a:fillRef idx="1">
+            <a:schemeClr val="accent1"/>
+          </a:fillRef>
+          <a:effectRef idx="0">
+            <a:srgbClr val="FFFFFF"/>
+          </a:effectRef>
+          <a:fontRef idx="minor">
+            <a:schemeClr val="lt1"/>
+          </a:fontRef>
+        </p:style>
+        <p:txBody>
+          <a:bodyPr rtlCol="0" anchor="ctr"/>
+          <a:p>
+            <a:pPr algn="ctr"/>
+            <a:endParaRPr lang="zh-CN" altLang="en-US"/>
+          </a:p>
+        </p:txBody>
+      </p:sp>
+      <p:sp>
+        <p:nvSpPr>
+          <p:cNvPr id="22" name="圆角矩形 21"/>
+          <p:cNvSpPr/>
+          <p:nvPr/>
+        </p:nvSpPr>
+        <p:spPr>
+          <a:xfrm>
+            <a:off x="7931785" y="5913120"/>
+            <a:ext cx="809625" cy="146050"/>
+          </a:xfrm>
+          <a:prstGeom prst="roundRect">
+            <a:avLst/>
+          </a:prstGeom>
+          <a:gradFill>
+            <a:gsLst>
+              <a:gs pos="0">
+                <a:schemeClr val="accent1">
+                  <a:lumMod val="5000"/>
+                  <a:lumOff val="95000"/>
+                </a:schemeClr>
+              </a:gs>
+              <a:gs pos="48000">
+                <a:schemeClr val="accent1">
+                  <a:lumMod val="45000"/>
+                  <a:lumOff val="55000"/>
+                </a:schemeClr>
+              </a:gs>
+              <a:gs pos="83000">
+                <a:schemeClr val="accent1">
+                  <a:lumMod val="45000"/>
+                  <a:lumOff val="55000"/>
+                </a:schemeClr>
+              </a:gs>
+              <a:gs pos="100000">
+                <a:schemeClr val="accent1">
+                  <a:lumMod val="30000"/>
+                  <a:lumOff val="70000"/>
+                </a:schemeClr>
+              </a:gs>
+            </a:gsLst>
+            <a:lin ang="5400000" scaled="0"/>
+          </a:gradFill>
+          <a:ln>
+            <a:noFill/>
+          </a:ln>
+        </p:spPr>
+        <p:style>
+          <a:lnRef idx="2">
+            <a:schemeClr val="accent1">
+              <a:lumMod val="75000"/>
+            </a:schemeClr>
+          </a:lnRef>
+          <a:fillRef idx="1">
+            <a:schemeClr val="accent1"/>
+          </a:fillRef>
+          <a:effectRef idx="0">
+            <a:srgbClr val="FFFFFF"/>
+          </a:effectRef>
+          <a:fontRef idx="minor">
+            <a:schemeClr val="lt1"/>
+          </a:fontRef>
+        </p:style>
+        <p:txBody>
+          <a:bodyPr rtlCol="0" anchor="ctr"/>
+          <a:p>
+            <a:pPr algn="ctr"/>
+            <a:endParaRPr lang="zh-CN" altLang="en-US"/>
+          </a:p>
+        </p:txBody>
+      </p:sp>
+      <p:sp>
+        <p:nvSpPr>
+          <p:cNvPr id="23" name="圆角矩形 22"/>
+          <p:cNvSpPr/>
+          <p:nvPr/>
+        </p:nvSpPr>
+        <p:spPr>
+          <a:xfrm>
+            <a:off x="7926705" y="6273165"/>
+            <a:ext cx="1726565" cy="146050"/>
+          </a:xfrm>
+          <a:prstGeom prst="roundRect">
+            <a:avLst/>
+          </a:prstGeom>
+          <a:gradFill>
+            <a:gsLst>
+              <a:gs pos="0">
+                <a:schemeClr val="accent1">
+                  <a:lumMod val="5000"/>
+                  <a:lumOff val="95000"/>
+                </a:schemeClr>
+              </a:gs>
+              <a:gs pos="48000">
+                <a:srgbClr val="FF0000"/>
+              </a:gs>
+              <a:gs pos="83000">
+                <a:srgbClr val="FCA492"/>
+              </a:gs>
+              <a:gs pos="100000">
+                <a:srgbClr val="FC022B"/>
+              </a:gs>
+            </a:gsLst>
+            <a:lin ang="5400000" scaled="0"/>
+          </a:gradFill>
+          <a:ln>
+            <a:noFill/>
+          </a:ln>
+        </p:spPr>
+        <p:style>
+          <a:lnRef idx="2">
+            <a:schemeClr val="accent1">
+              <a:lumMod val="75000"/>
+            </a:schemeClr>
+          </a:lnRef>
+          <a:fillRef idx="1">
+            <a:schemeClr val="accent1"/>
+          </a:fillRef>
+          <a:effectRef idx="0">
+            <a:srgbClr val="FFFFFF"/>
+          </a:effectRef>
+          <a:fontRef idx="minor">
+            <a:schemeClr val="lt1"/>
+          </a:fontRef>
+        </p:style>
+        <p:txBody>
+          <a:bodyPr rtlCol="0" anchor="ctr"/>
+          <a:p>
+            <a:pPr algn="ctr"/>
+            <a:endParaRPr lang="zh-CN" altLang="en-US"/>
+          </a:p>
+        </p:txBody>
+      </p:sp>
+      <p:pic>
+        <p:nvPicPr>
+          <p:cNvPr id="24" name="图片 23" descr="对,正确,打勾"/>
+          <p:cNvPicPr>
+            <a:picLocks noChangeAspect="1"/>
+          </p:cNvPicPr>
+          <p:nvPr/>
+        </p:nvPicPr>
+        <p:blipFill>
+          <a:blip r:embed="rId23">
+            <a:extLst>
+              <a:ext uri="{96DAC541-7B7A-43D3-8B79-37D633B846F1}">
+                <asvg:svgBlip xmlns:asvg="http://schemas.microsoft.com/office/drawing/2016/SVG/main" r:embed="rId24"/>
+              </a:ext>
+            </a:extLst>
+          </a:blip>
+          <a:stretch>
+            <a:fillRect/>
+          </a:stretch>
+        </p:blipFill>
+        <p:spPr>
+          <a:xfrm>
+            <a:off x="9697085" y="6129655"/>
+            <a:ext cx="385445" cy="385445"/>
+          </a:xfrm>
+          <a:prstGeom prst="rect">
+            <a:avLst/>
+          </a:prstGeom>
+        </p:spPr>
+      </p:pic>
+      <p:sp>
+        <p:nvSpPr>
+          <p:cNvPr id="29" name="Text 28"/>
+          <p:cNvSpPr/>
+          <p:nvPr/>
+        </p:nvSpPr>
+        <p:spPr>
+          <a:xfrm>
+            <a:off x="8792845" y="5636260"/>
+            <a:ext cx="1590040" cy="548640"/>
+          </a:xfrm>
+          <a:prstGeom prst="rect">
+            <a:avLst/>
+          </a:prstGeom>
+          <a:noFill/>
+        </p:spPr>
+        <p:txBody>
+          <a:bodyPr wrap="square" lIns="0" tIns="0" rIns="0" bIns="0" rtlCol="0" anchor="t"/>
+          <a:lstStyle/>
+          <a:p>
+            <a:pPr marL="0" indent="0" algn="ctr">
+              <a:lnSpc>
+                <a:spcPct val="98000"/>
+              </a:lnSpc>
+              <a:buNone/>
+            </a:pPr>
+            <a:r>
+              <a:rPr lang="zh-CN" altLang="en-US" sz="1600" b="1" dirty="0">
+                <a:solidFill>
+                  <a:srgbClr val="2E54A1"/>
+                </a:solidFill>
+                <a:latin typeface="微软雅黑" panose="020B0503020204020204" pitchFamily="34" charset="-122"/>
+                <a:ea typeface="微软雅黑" panose="020B0503020204020204" pitchFamily="34" charset="-122"/>
+                <a:cs typeface="微软雅黑" panose="020B0503020204020204" pitchFamily="34" charset="-120"/>
+              </a:rPr>
+              <a:t>各专家模型通过权重</a:t>
+            </a:r>
+            <a:r>
+              <a:rPr lang="zh-CN" altLang="en-US" sz="1600" b="1" dirty="0">
+                <a:solidFill>
+                  <a:srgbClr val="2E54A1"/>
+                </a:solidFill>
+                <a:latin typeface="微软雅黑" panose="020B0503020204020204" pitchFamily="34" charset="-122"/>
+                <a:ea typeface="微软雅黑" panose="020B0503020204020204" pitchFamily="34" charset="-122"/>
+                <a:cs typeface="微软雅黑" panose="020B0503020204020204" pitchFamily="34" charset="-120"/>
+              </a:rPr>
+              <a:t>分配合作</a:t>
+            </a:r>
+            <a:endParaRPr lang="zh-CN" altLang="en-US" sz="1600" b="1" dirty="0">
+              <a:solidFill>
+                <a:srgbClr val="2E54A1"/>
+              </a:solidFill>
+              <a:latin typeface="微软雅黑" panose="020B0503020204020204" pitchFamily="34" charset="-122"/>
+              <a:ea typeface="微软雅黑" panose="020B0503020204020204" pitchFamily="34" charset="-122"/>
+              <a:cs typeface="微软雅黑" panose="020B0503020204020204" pitchFamily="34" charset="-120"/>
+            </a:endParaRPr>
+          </a:p>
+        </p:txBody>
+      </p:sp>
     </p:spTree>
   </p:cSld>
   <p:clrMapOvr>
